--- a/TRIPWIRE_PITCH_DECK.pptx
+++ b/TRIPWIRE_PITCH_DECK.pptx
@@ -20,6 +20,8 @@
     <p:sldId id="268" r:id="rId19"/>
     <p:sldId id="269" r:id="rId20"/>
     <p:sldId id="270" r:id="rId21"/>
+    <p:sldId id="271" r:id="rId22"/>
+    <p:sldId id="272" r:id="rId23"/>
   </p:sldIdLst>
   <p:sldSz cx="12191695" cy="6858000" type="screen4x3"/>
   <p:notesSz cx="6858000" cy="9144000"/>
@@ -3220,7 +3222,7 @@
               </a:defRPr>
             </a:pPr>
             <a:r>
-              <a:t>HACKATHON PRESENTATION | AI IN HIGHER EDUCATION</a:t>
+              <a:t>HACKATHON PRESENTATION | AI &amp; ANALYTICS IN HIGHER EDUCATION</a:t>
             </a:r>
           </a:p>
           <a:p>
@@ -3244,7 +3246,7 @@
               </a:defRPr>
             </a:pPr>
             <a:r>
-              <a:t>The Predictive Behavioral Intelligence Layer for Standard College ERPs</a:t>
+              <a:t>The Predictive Behavioral Early-Warning Layer for Standard College ERPs</a:t>
             </a:r>
           </a:p>
           <a:p>
@@ -3257,7 +3259,11 @@
             </a:pPr>
             <a:br/>
             <a:r>
-              <a:t>"Tripwire is designed to ingest attendance/academic data from standard college ERP systems (like ETLAB) rather than requiring a new platform — no new sensors, no separate student-facing app."</a:t>
+              <a:t>"Tripwire doesn't replace the faculty mentor—it notices the right student at the right time."</a:t>
+            </a:r>
+            <a:br/>
+            <a:r>
+              <a:t>Seamlessly ingests telemetry from existing systems (ETLAB, Linways) with zero student surveillance.</a:t>
             </a:r>
           </a:p>
           <a:p>
@@ -3270,7 +3276,7 @@
             </a:pPr>
             <a:br/>
             <a:r>
-              <a:t>Compatible with University Systems: KTU, Autonomous Engineering Colleges &amp; Technical Institutions</a:t>
+              <a:t>Built for University Compliance: KTU, Autonomous Technical Colleges &amp; Higher Education Institutions</a:t>
             </a:r>
           </a:p>
         </p:txBody>
@@ -3366,7 +3372,7 @@
               </a:defRPr>
             </a:pPr>
             <a:r>
-              <a:t>8. WORKING PROTOTYPE: BATCH ATTENDANCE REGISTER</a:t>
+              <a:t>8. WORKING PROTOTYPE: FACULTY RISK RADAR &amp; COHORT HEATMAP</a:t>
             </a:r>
           </a:p>
         </p:txBody>
@@ -3401,7 +3407,7 @@
               </a:defRPr>
             </a:pPr>
             <a:r>
-              <a:t>Interface 2: One-Click Classroom Telemetry Recording with Reliable Persistence</a:t>
+              <a:t>Interface 1: Live Dashboard Visualizing Student Behavioral Distribution</a:t>
             </a:r>
           </a:p>
           <a:p>
@@ -3413,14 +3419,14 @@
               </a:defRPr>
             </a:pPr>
             <a:r>
-              <a:t>Live screenshot of the Batch Attendance Register modal with date, period, and status buttons.</a:t>
+              <a:t>Live screenshot from the running Tripwire web application.</a:t>
             </a:r>
           </a:p>
         </p:txBody>
       </p:sp>
       <p:pic>
         <p:nvPicPr>
-          <p:cNvPr id="5" name="Picture 4" descr="04_batch_attendance.png"/>
+          <p:cNvPr id="5" name="Picture 4" descr="02_dashboard.png"/>
           <p:cNvPicPr>
             <a:picLocks noChangeAspect="1"/>
           </p:cNvPicPr>
@@ -3461,7 +3467,7 @@
           </a:solidFill>
           <a:ln w="12700">
             <a:solidFill>
-              <a:srgbClr val="0EA5E9"/>
+              <a:srgbClr val="6366F1"/>
             </a:solidFill>
           </a:ln>
         </p:spPr>
@@ -3512,12 +3518,12 @@
             <a:pPr>
               <a:defRPr sz="1300" b="1">
                 <a:solidFill>
-                  <a:srgbClr val="0EA5E9"/>
-                </a:solidFill>
-              </a:defRPr>
-            </a:pPr>
-            <a:r>
-              <a:t>INTERFACE: Batch Register Modal</a:t>
+                  <a:srgbClr val="6366F1"/>
+                </a:solidFill>
+              </a:defRPr>
+            </a:pPr>
+            <a:r>
+              <a:t>INTERFACE: Risk Radar Dashboard</a:t>
             </a:r>
           </a:p>
           <a:p>
@@ -3530,7 +3536,7 @@
               </a:defRPr>
             </a:pPr>
             <a:r>
-              <a:t>✔ Classroom Cohort View: Mark daily attendance across Present (P), Absent (A), Late (L), and Excused (E) in seconds.</a:t>
+              <a:t>✔ Cohort Heatmap: Visualizes 50 students categorized into 7 behavioral archetypes (Normal, Slow Decline, Rapid Decline, Monitoring, Recovery, etc.).</a:t>
             </a:r>
           </a:p>
           <a:p>
@@ -3543,7 +3549,7 @@
               </a:defRPr>
             </a:pPr>
             <a:r>
-              <a:t>✔ Period &amp; Date Navigation: Select Periods 1–6 with morning period tracking for anomaly detection.</a:t>
+              <a:t>✔ Triaged Alert Queue: Surfaces active alerts prioritized by drift velocity rather than static grades.</a:t>
             </a:r>
           </a:p>
           <a:p>
@@ -3556,7 +3562,7 @@
               </a:defRPr>
             </a:pPr>
             <a:r>
-              <a:t>✔ Database State Persistence: Reopening the modal or changing dates automatically loads saved attendance records—eliminating fresh resets.</a:t>
+              <a:t>✔ Real-Time Metrics: Displays cohort average attendance, submission delays, and high-risk flags at a glance.</a:t>
             </a:r>
           </a:p>
           <a:p>
@@ -3569,7 +3575,7 @@
               </a:defRPr>
             </a:pPr>
             <a:r>
-              <a:t>✔ Immediate Velocity Recalculation: Submitting attendance instantly re-evaluates DVI scores across all students in under 200ms.</a:t>
+              <a:t>✔ Zero Guesswork: Faculty immediately see which students need support right now, without sifting through spreadsheets.</a:t>
             </a:r>
           </a:p>
         </p:txBody>
@@ -3665,7 +3671,7 @@
               </a:defRPr>
             </a:pPr>
             <a:r>
-              <a:t>8. WORKING PROTOTYPE: STUDENT PROFILE &amp; COUNTERFACTUAL XAI</a:t>
+              <a:t>8. WORKING PROTOTYPE: BATCH ATTENDANCE REGISTER</a:t>
             </a:r>
           </a:p>
         </p:txBody>
@@ -3700,7 +3706,7 @@
               </a:defRPr>
             </a:pPr>
             <a:r>
-              <a:t>Interface 3: Deep Behavioral Analytics &amp; 'What-If' Guidance for Rahul (CSE24001)</a:t>
+              <a:t>Interface 2: One-Click Classroom Telemetry Recording with Reliable Persistence</a:t>
             </a:r>
           </a:p>
           <a:p>
@@ -3712,14 +3718,14 @@
               </a:defRPr>
             </a:pPr>
             <a:r>
-              <a:t>Live screenshot of Rahul's profile with DVI radial gauge, component waterfall, and recovery targets.</a:t>
+              <a:t>Live screenshot of the Batch Attendance Register modal with date, period, and status buttons.</a:t>
             </a:r>
           </a:p>
         </p:txBody>
       </p:sp>
       <p:pic>
         <p:nvPicPr>
-          <p:cNvPr id="5" name="Picture 4" descr="05_student_profile_rahul.png"/>
+          <p:cNvPr id="5" name="Picture 4" descr="04_batch_attendance.png"/>
           <p:cNvPicPr>
             <a:picLocks noChangeAspect="1"/>
           </p:cNvPicPr>
@@ -3760,7 +3766,7 @@
           </a:solidFill>
           <a:ln w="12700">
             <a:solidFill>
-              <a:srgbClr val="EF4444"/>
+              <a:srgbClr val="0EA5E9"/>
             </a:solidFill>
           </a:ln>
         </p:spPr>
@@ -3811,12 +3817,12 @@
             <a:pPr>
               <a:defRPr sz="1300" b="1">
                 <a:solidFill>
-                  <a:srgbClr val="EF4444"/>
-                </a:solidFill>
-              </a:defRPr>
-            </a:pPr>
-            <a:r>
-              <a:t>INTERFACE: Explainable Profile</a:t>
+                  <a:srgbClr val="0EA5E9"/>
+                </a:solidFill>
+              </a:defRPr>
+            </a:pPr>
+            <a:r>
+              <a:t>INTERFACE: Batch Register Modal</a:t>
             </a:r>
           </a:p>
           <a:p>
@@ -3829,7 +3835,7 @@
               </a:defRPr>
             </a:pPr>
             <a:r>
-              <a:t>✔ DVI Radial Gauge: Displays real-time drift score (74 High Risk) with velocity indicator.</a:t>
+              <a:t>✔ Classroom Cohort View: Mark daily attendance across Present (P), Absent (A), Late (L), and Excused (E) in seconds.</a:t>
             </a:r>
           </a:p>
           <a:p>
@@ -3842,7 +3848,7 @@
               </a:defRPr>
             </a:pPr>
             <a:r>
-              <a:t>✔ Multi-Vector Attribution: Explicitly breaks down risk origin (28 pts from attendance drop, 30 pts from submission latency, 16 pts from LMS).</a:t>
+              <a:t>✔ Period &amp; Date Navigation: Select Periods 1–6 with morning period tracking for anomaly detection.</a:t>
             </a:r>
           </a:p>
           <a:p>
@@ -3855,7 +3861,7 @@
               </a:defRPr>
             </a:pPr>
             <a:r>
-              <a:t>✔ Actionable Counterfactual: Generates specific guidance: 'Submitting Assignment 3 and attending upcoming labs drops DVI by 28 points to 46 (Safe zone).'</a:t>
+              <a:t>✔ Database State Persistence: Reopening the modal or changing dates automatically loads saved attendance records—eliminating fresh resets.</a:t>
             </a:r>
           </a:p>
           <a:p>
@@ -3868,7 +3874,7 @@
               </a:defRPr>
             </a:pPr>
             <a:r>
-              <a:t>✔ Human-Centric Mentoring: Transforms data from punitive labels into positive, constructive student check-in conversations.</a:t>
+              <a:t>✔ Immediate Velocity Recalculation: Submitting attendance instantly re-evaluates DVI scores across all students in under 200ms.</a:t>
             </a:r>
           </a:p>
         </p:txBody>
@@ -3964,7 +3970,7 @@
               </a:defRPr>
             </a:pPr>
             <a:r>
-              <a:t>8. WORKING PROTOTYPE: CLOSED-LOOP INTERVENTION TRACKING</a:t>
+              <a:t>8. WORKING PROTOTYPE: STUDENT PROFILE &amp; COUNTERFACTUAL XAI</a:t>
             </a:r>
           </a:p>
         </p:txBody>
@@ -3999,7 +4005,7 @@
               </a:defRPr>
             </a:pPr>
             <a:r>
-              <a:t>Interface 4: Logging Advisor Consultations, Outcomes &amp; Hysteresis Recovery</a:t>
+              <a:t>Interface 3: Deep Behavioral Analytics &amp; 'What-If' Guidance for Rahul (CSE24001)</a:t>
             </a:r>
           </a:p>
           <a:p>
@@ -4011,14 +4017,14 @@
               </a:defRPr>
             </a:pPr>
             <a:r>
-              <a:t>Live screenshot of the Faculty Interventions Log &amp; Recovery Monitoring pipeline.</a:t>
+              <a:t>Live screenshot of Rahul's profile with DVI radial gauge, component waterfall, and recovery targets.</a:t>
             </a:r>
           </a:p>
         </p:txBody>
       </p:sp>
       <p:pic>
         <p:nvPicPr>
-          <p:cNvPr id="5" name="Picture 4" descr="06_interventions.png"/>
+          <p:cNvPr id="5" name="Picture 4" descr="05_student_profile_rahul.png"/>
           <p:cNvPicPr>
             <a:picLocks noChangeAspect="1"/>
           </p:cNvPicPr>
@@ -4059,7 +4065,7 @@
           </a:solidFill>
           <a:ln w="12700">
             <a:solidFill>
-              <a:srgbClr val="10B981"/>
+              <a:srgbClr val="EF4444"/>
             </a:solidFill>
           </a:ln>
         </p:spPr>
@@ -4110,64 +4116,77 @@
             <a:pPr>
               <a:defRPr sz="1300" b="1">
                 <a:solidFill>
-                  <a:srgbClr val="10B981"/>
-                </a:solidFill>
-              </a:defRPr>
-            </a:pPr>
-            <a:r>
-              <a:t>INTERFACE: Intervention Log</a:t>
+                  <a:srgbClr val="EF4444"/>
+                </a:solidFill>
+              </a:defRPr>
+            </a:pPr>
+            <a:r>
+              <a:t>INTERFACE: Explainable Profile</a:t>
             </a:r>
           </a:p>
           <a:p>
             <a:br/>
             <a:pPr>
-              <a:defRPr sz="1000">
+              <a:defRPr sz="950">
                 <a:solidFill>
                   <a:srgbClr val="F8FAFC"/>
                 </a:solidFill>
               </a:defRPr>
             </a:pPr>
             <a:r>
-              <a:t>✔ Structured Consultation Logging: Records in-person meetings, phone check-ins, or academic referrals in 30 seconds.</a:t>
+              <a:t>✔ DVI Radial Gauge: Displays real-time drift score (74 High Risk) with velocity indicator.</a:t>
             </a:r>
           </a:p>
           <a:p>
             <a:br/>
             <a:pPr>
-              <a:defRPr sz="1000">
+              <a:defRPr sz="950">
                 <a:solidFill>
                   <a:srgbClr val="F8FAFC"/>
                 </a:solidFill>
               </a:defRPr>
             </a:pPr>
             <a:r>
-              <a:t>✔ Root Cause Identification: Flags whether the distress was academic difficulty, personal difficulty, or health-related.</a:t>
+              <a:t>✔ 4-Vector Attribution: Explicit breakdown across Series Exam Drift (30%), Attendance Drift (30%), Submission Latency (30%), and LMS Activity (10%).</a:t>
             </a:r>
           </a:p>
           <a:p>
             <a:br/>
             <a:pPr>
-              <a:defRPr sz="1000">
+              <a:defRPr sz="950">
                 <a:solidFill>
                   <a:srgbClr val="F8FAFC"/>
                 </a:solidFill>
               </a:defRPr>
             </a:pPr>
             <a:r>
-              <a:t>✔ Hysteresis Recovery Monitoring: Alert clears only when student's DVI drops below 50, preventing alert oscillation.</a:t>
+              <a:t>✔ Statutory Exam Eligibility Status: Evaluates 75% attendance threshold and 40% CIE pass mark projection.</a:t>
             </a:r>
           </a:p>
           <a:p>
             <a:br/>
             <a:pPr>
-              <a:defRPr sz="1000">
+              <a:defRPr sz="950">
                 <a:solidFill>
                   <a:srgbClr val="F8FAFC"/>
                 </a:solidFill>
               </a:defRPr>
             </a:pPr>
             <a:r>
-              <a:t>✔ Institutional Accountability: Provides deans with verified audit trails of proactive faculty mentorship.</a:t>
+              <a:t>✔ Actionable Counterfactual: Generates specific guidance: 'Submitting Assignment 3 and attending upcoming labs drops DVI by 28 points to 46 (Safe zone).'</a:t>
+            </a:r>
+          </a:p>
+          <a:p>
+            <a:br/>
+            <a:pPr>
+              <a:defRPr sz="950">
+                <a:solidFill>
+                  <a:srgbClr val="F8FAFC"/>
+                </a:solidFill>
+              </a:defRPr>
+            </a:pPr>
+            <a:r>
+              <a:t>✔ Human-Centric Mentoring: Transforms data from punitive labels into positive, constructive student check-in conversations.</a:t>
             </a:r>
           </a:p>
         </p:txBody>
@@ -4263,7 +4282,7 @@
               </a:defRPr>
             </a:pPr>
             <a:r>
-              <a:t>9. IMPACT &amp; USEFULNESS</a:t>
+              <a:t>8. WORKING PROTOTYPE: CLOSED-LOOP INTERVENTION TRACKING</a:t>
             </a:r>
           </a:p>
         </p:txBody>
@@ -4298,7 +4317,7 @@
               </a:defRPr>
             </a:pPr>
             <a:r>
-              <a:t>Measurable Retention ROI, Academic Equity &amp; Privacy Safeguards</a:t>
+              <a:t>Interface 4: Logging Advisor Consultations, Outcomes &amp; Hysteresis Recovery</a:t>
             </a:r>
           </a:p>
           <a:p>
@@ -4310,231 +4329,45 @@
               </a:defRPr>
             </a:pPr>
             <a:r>
-              <a:t>Quantified institutional impact engineered with ethical AI principles.</a:t>
-            </a:r>
-          </a:p>
-        </p:txBody>
-      </p:sp>
-      <p:sp>
-        <p:nvSpPr>
-          <p:cNvPr id="5" name="Rounded Rectangle 4"/>
+              <a:t>Live screenshot of the Faculty Interventions Log &amp; Recovery Monitoring pipeline.</a:t>
+            </a:r>
+          </a:p>
+        </p:txBody>
+      </p:sp>
+      <p:pic>
+        <p:nvPicPr>
+          <p:cNvPr id="5" name="Picture 4" descr="06_interventions.png"/>
+          <p:cNvPicPr>
+            <a:picLocks noChangeAspect="1"/>
+          </p:cNvPicPr>
+          <p:nvPr/>
+        </p:nvPicPr>
+        <p:blipFill>
+          <a:blip r:embed="rId2"/>
+          <a:stretch>
+            <a:fillRect/>
+          </a:stretch>
+        </p:blipFill>
+        <p:spPr>
+          <a:xfrm>
+            <a:off x="731520" y="1463040"/>
+            <a:ext cx="6858000" cy="4389120"/>
+          </a:xfrm>
+          <a:prstGeom prst="rect">
+            <a:avLst/>
+          </a:prstGeom>
+        </p:spPr>
+      </p:pic>
+      <p:sp>
+        <p:nvSpPr>
+          <p:cNvPr id="6" name="Rounded Rectangle 5"/>
           <p:cNvSpPr/>
           <p:nvPr/>
         </p:nvSpPr>
         <p:spPr>
           <a:xfrm>
-            <a:off x="731520" y="1463040"/>
-            <a:ext cx="3429000" cy="2194560"/>
-          </a:xfrm>
-          <a:prstGeom prst="roundRect">
-            <a:avLst/>
-          </a:prstGeom>
-          <a:solidFill>
-            <a:srgbClr val="131A2B"/>
-          </a:solidFill>
-          <a:ln w="12700">
-            <a:solidFill>
-              <a:srgbClr val="6366F1"/>
-            </a:solidFill>
-          </a:ln>
-        </p:spPr>
-        <p:style>
-          <a:lnRef idx="1">
-            <a:schemeClr val="accent1"/>
-          </a:lnRef>
-          <a:fillRef idx="3">
-            <a:schemeClr val="accent1"/>
-          </a:fillRef>
-          <a:effectRef idx="2">
-            <a:schemeClr val="accent1"/>
-          </a:effectRef>
-          <a:fontRef idx="minor">
-            <a:schemeClr val="lt1"/>
-          </a:fontRef>
-        </p:style>
-        <p:txBody>
-          <a:bodyPr rtlCol="0" anchor="ctr"/>
-          <a:lstStyle/>
-          <a:p>
-            <a:pPr algn="ctr"/>
-          </a:p>
-        </p:txBody>
-      </p:sp>
-      <p:sp>
-        <p:nvSpPr>
-          <p:cNvPr id="6" name="TextBox 5"/>
-          <p:cNvSpPr txBox="1"/>
-          <p:nvPr/>
-        </p:nvSpPr>
-        <p:spPr>
-          <a:xfrm>
-            <a:off x="914400" y="1600200"/>
-            <a:ext cx="3063240" cy="1920240"/>
-          </a:xfrm>
-          <a:prstGeom prst="rect">
-            <a:avLst/>
-          </a:prstGeom>
-          <a:noFill/>
-        </p:spPr>
-        <p:txBody>
-          <a:bodyPr wrap="square">
-            <a:spAutoFit/>
-          </a:bodyPr>
-          <a:lstStyle/>
-          <a:p>
-            <a:pPr>
-              <a:defRPr sz="2200" b="1">
-                <a:solidFill>
-                  <a:srgbClr val="6366F1"/>
-                </a:solidFill>
-              </a:defRPr>
-            </a:pPr>
-            <a:r>
-              <a:t>21–28 Days Earlier</a:t>
-            </a:r>
-          </a:p>
-          <a:p>
-            <a:pPr>
-              <a:defRPr sz="1100" b="1">
-                <a:solidFill>
-                  <a:srgbClr val="F8FAFC"/>
-                </a:solidFill>
-              </a:defRPr>
-            </a:pPr>
-            <a:r>
-              <a:t>LEAD TIME ADVANTAGE</a:t>
-            </a:r>
-          </a:p>
-          <a:p>
-            <a:br/>
-            <a:pPr>
-              <a:defRPr sz="950">
-                <a:solidFill>
-                  <a:srgbClr val="94A3B8"/>
-                </a:solidFill>
-              </a:defRPr>
-            </a:pPr>
-            <a:r>
-              <a:t>Detects micro-drift in 14-day rolling windows rather than waiting 90 days for midterms or end-of-term hall ticket blocks.</a:t>
-            </a:r>
-          </a:p>
-        </p:txBody>
-      </p:sp>
-      <p:sp>
-        <p:nvSpPr>
-          <p:cNvPr id="7" name="Rounded Rectangle 6"/>
-          <p:cNvSpPr/>
-          <p:nvPr/>
-        </p:nvSpPr>
-        <p:spPr>
-          <a:xfrm>
-            <a:off x="4343400" y="1463040"/>
-            <a:ext cx="3429000" cy="2194560"/>
-          </a:xfrm>
-          <a:prstGeom prst="roundRect">
-            <a:avLst/>
-          </a:prstGeom>
-          <a:solidFill>
-            <a:srgbClr val="131A2B"/>
-          </a:solidFill>
-          <a:ln w="12700">
-            <a:solidFill>
-              <a:srgbClr val="0EA5E9"/>
-            </a:solidFill>
-          </a:ln>
-        </p:spPr>
-        <p:style>
-          <a:lnRef idx="1">
-            <a:schemeClr val="accent1"/>
-          </a:lnRef>
-          <a:fillRef idx="3">
-            <a:schemeClr val="accent1"/>
-          </a:fillRef>
-          <a:effectRef idx="2">
-            <a:schemeClr val="accent1"/>
-          </a:effectRef>
-          <a:fontRef idx="minor">
-            <a:schemeClr val="lt1"/>
-          </a:fontRef>
-        </p:style>
-        <p:txBody>
-          <a:bodyPr rtlCol="0" anchor="ctr"/>
-          <a:lstStyle/>
-          <a:p>
-            <a:pPr algn="ctr"/>
-          </a:p>
-        </p:txBody>
-      </p:sp>
-      <p:sp>
-        <p:nvSpPr>
-          <p:cNvPr id="8" name="TextBox 7"/>
-          <p:cNvSpPr txBox="1"/>
-          <p:nvPr/>
-        </p:nvSpPr>
-        <p:spPr>
-          <a:xfrm>
-            <a:off x="4526280" y="1600200"/>
-            <a:ext cx="3063240" cy="1920240"/>
-          </a:xfrm>
-          <a:prstGeom prst="rect">
-            <a:avLst/>
-          </a:prstGeom>
-          <a:noFill/>
-        </p:spPr>
-        <p:txBody>
-          <a:bodyPr wrap="square">
-            <a:spAutoFit/>
-          </a:bodyPr>
-          <a:lstStyle/>
-          <a:p>
-            <a:pPr>
-              <a:defRPr sz="2200" b="1">
-                <a:solidFill>
-                  <a:srgbClr val="0EA5E9"/>
-                </a:solidFill>
-              </a:defRPr>
-            </a:pPr>
-            <a:r>
-              <a:t>85% Reduction</a:t>
-            </a:r>
-          </a:p>
-          <a:p>
-            <a:pPr>
-              <a:defRPr sz="1100" b="1">
-                <a:solidFill>
-                  <a:srgbClr val="F8FAFC"/>
-                </a:solidFill>
-              </a:defRPr>
-            </a:pPr>
-            <a:r>
-              <a:t>FACULTY TRIAGE OVERHEAD</a:t>
-            </a:r>
-          </a:p>
-          <a:p>
-            <a:br/>
-            <a:pPr>
-              <a:defRPr sz="950">
-                <a:solidFill>
-                  <a:srgbClr val="94A3B8"/>
-                </a:solidFill>
-              </a:defRPr>
-            </a:pPr>
-            <a:r>
-              <a:t>Automated velocity scoring highlights the top 5 at-risk students out of 100 in less than 10 seconds.</a:t>
-            </a:r>
-          </a:p>
-        </p:txBody>
-      </p:sp>
-      <p:sp>
-        <p:nvSpPr>
-          <p:cNvPr id="9" name="Rounded Rectangle 8"/>
-          <p:cNvSpPr/>
-          <p:nvPr/>
-        </p:nvSpPr>
-        <p:spPr>
-          <a:xfrm>
-            <a:off x="7955280" y="1463040"/>
-            <a:ext cx="3429000" cy="2194560"/>
+            <a:off x="7772400" y="1463040"/>
+            <a:ext cx="3657600" cy="4389120"/>
           </a:xfrm>
           <a:prstGeom prst="roundRect">
             <a:avLst/>
@@ -4572,14 +4405,14 @@
       </p:sp>
       <p:sp>
         <p:nvSpPr>
-          <p:cNvPr id="10" name="TextBox 9"/>
+          <p:cNvPr id="7" name="TextBox 6"/>
           <p:cNvSpPr txBox="1"/>
           <p:nvPr/>
         </p:nvSpPr>
         <p:spPr>
           <a:xfrm>
-            <a:off x="8138160" y="1600200"/>
-            <a:ext cx="3063240" cy="1920240"/>
+            <a:off x="8001000" y="1645920"/>
+            <a:ext cx="3200400" cy="4023360"/>
           </a:xfrm>
           <a:prstGeom prst="rect">
             <a:avLst/>
@@ -4593,354 +4426,66 @@
           <a:lstStyle/>
           <a:p>
             <a:pPr>
-              <a:defRPr sz="2200" b="1">
+              <a:defRPr sz="1300" b="1">
                 <a:solidFill>
                   <a:srgbClr val="10B981"/>
                 </a:solidFill>
               </a:defRPr>
             </a:pPr>
             <a:r>
-              <a:t>15–20% Reduction</a:t>
-            </a:r>
-          </a:p>
-          <a:p>
-            <a:pPr>
-              <a:defRPr sz="1100" b="1">
+              <a:t>INTERFACE: Intervention Log</a:t>
+            </a:r>
+          </a:p>
+          <a:p>
+            <a:br/>
+            <a:pPr>
+              <a:defRPr sz="1000">
                 <a:solidFill>
                   <a:srgbClr val="F8FAFC"/>
                 </a:solidFill>
               </a:defRPr>
             </a:pPr>
             <a:r>
-              <a:t>AVOIDABLE DEBARMENTS</a:t>
+              <a:t>✔ Structured Consultation Logging: Records in-person meetings, phone check-ins, or academic referrals in 30 seconds.</a:t>
             </a:r>
           </a:p>
           <a:p>
             <a:br/>
             <a:pPr>
-              <a:defRPr sz="950">
-                <a:solidFill>
-                  <a:srgbClr val="94A3B8"/>
-                </a:solidFill>
-              </a:defRPr>
-            </a:pPr>
-            <a:r>
-              <a:t>Early velocity check-ins prevent students from sliding past the non-recoverable 75% university attendance threshold.</a:t>
-            </a:r>
-          </a:p>
-        </p:txBody>
-      </p:sp>
-      <p:sp>
-        <p:nvSpPr>
-          <p:cNvPr id="11" name="Rounded Rectangle 10"/>
-          <p:cNvSpPr/>
-          <p:nvPr/>
-        </p:nvSpPr>
-        <p:spPr>
-          <a:xfrm>
-            <a:off x="731520" y="3840480"/>
-            <a:ext cx="3429000" cy="2194560"/>
-          </a:xfrm>
-          <a:prstGeom prst="roundRect">
-            <a:avLst/>
-          </a:prstGeom>
-          <a:solidFill>
-            <a:srgbClr val="131A2B"/>
-          </a:solidFill>
-          <a:ln w="12700">
-            <a:solidFill>
-              <a:srgbClr val="F59E0B"/>
-            </a:solidFill>
-          </a:ln>
-        </p:spPr>
-        <p:style>
-          <a:lnRef idx="1">
-            <a:schemeClr val="accent1"/>
-          </a:lnRef>
-          <a:fillRef idx="3">
-            <a:schemeClr val="accent1"/>
-          </a:fillRef>
-          <a:effectRef idx="2">
-            <a:schemeClr val="accent1"/>
-          </a:effectRef>
-          <a:fontRef idx="minor">
-            <a:schemeClr val="lt1"/>
-          </a:fontRef>
-        </p:style>
-        <p:txBody>
-          <a:bodyPr rtlCol="0" anchor="ctr"/>
-          <a:lstStyle/>
-          <a:p>
-            <a:pPr algn="ctr"/>
-          </a:p>
-        </p:txBody>
-      </p:sp>
-      <p:sp>
-        <p:nvSpPr>
-          <p:cNvPr id="12" name="TextBox 11"/>
-          <p:cNvSpPr txBox="1"/>
-          <p:nvPr/>
-        </p:nvSpPr>
-        <p:spPr>
-          <a:xfrm>
-            <a:off x="914400" y="3977640"/>
-            <a:ext cx="3063240" cy="1920240"/>
-          </a:xfrm>
-          <a:prstGeom prst="rect">
-            <a:avLst/>
-          </a:prstGeom>
-          <a:noFill/>
-        </p:spPr>
-        <p:txBody>
-          <a:bodyPr wrap="square">
-            <a:spAutoFit/>
-          </a:bodyPr>
-          <a:lstStyle/>
-          <a:p>
-            <a:pPr>
-              <a:defRPr sz="2200" b="1">
-                <a:solidFill>
-                  <a:srgbClr val="F59E0B"/>
-                </a:solidFill>
-              </a:defRPr>
-            </a:pPr>
-            <a:r>
-              <a:t>Zero Student Stigma</a:t>
-            </a:r>
-          </a:p>
-          <a:p>
-            <a:pPr>
-              <a:defRPr sz="1100" b="1">
+              <a:defRPr sz="1000">
                 <a:solidFill>
                   <a:srgbClr val="F8FAFC"/>
                 </a:solidFill>
               </a:defRPr>
             </a:pPr>
             <a:r>
-              <a:t>DIGNITY-PRESERVING SAFETY NET</a:t>
+              <a:t>✔ Root Cause Identification: Flags whether the distress was academic difficulty, personal difficulty, or health-related.</a:t>
             </a:r>
           </a:p>
           <a:p>
             <a:br/>
             <a:pPr>
-              <a:defRPr sz="950">
-                <a:solidFill>
-                  <a:srgbClr val="94A3B8"/>
-                </a:solidFill>
-              </a:defRPr>
-            </a:pPr>
-            <a:r>
-              <a:t>Alerts are strictly private to designated mentors. Students are never shown a demoralizing public 'High Risk' badge.</a:t>
-            </a:r>
-          </a:p>
-        </p:txBody>
-      </p:sp>
-      <p:sp>
-        <p:nvSpPr>
-          <p:cNvPr id="13" name="Rounded Rectangle 12"/>
-          <p:cNvSpPr/>
-          <p:nvPr/>
-        </p:nvSpPr>
-        <p:spPr>
-          <a:xfrm>
-            <a:off x="4343400" y="3840480"/>
-            <a:ext cx="3429000" cy="2194560"/>
-          </a:xfrm>
-          <a:prstGeom prst="roundRect">
-            <a:avLst/>
-          </a:prstGeom>
-          <a:solidFill>
-            <a:srgbClr val="131A2B"/>
-          </a:solidFill>
-          <a:ln w="12700">
-            <a:solidFill>
-              <a:srgbClr val="EF4444"/>
-            </a:solidFill>
-          </a:ln>
-        </p:spPr>
-        <p:style>
-          <a:lnRef idx="1">
-            <a:schemeClr val="accent1"/>
-          </a:lnRef>
-          <a:fillRef idx="3">
-            <a:schemeClr val="accent1"/>
-          </a:fillRef>
-          <a:effectRef idx="2">
-            <a:schemeClr val="accent1"/>
-          </a:effectRef>
-          <a:fontRef idx="minor">
-            <a:schemeClr val="lt1"/>
-          </a:fontRef>
-        </p:style>
-        <p:txBody>
-          <a:bodyPr rtlCol="0" anchor="ctr"/>
-          <a:lstStyle/>
-          <a:p>
-            <a:pPr algn="ctr"/>
-          </a:p>
-        </p:txBody>
-      </p:sp>
-      <p:sp>
-        <p:nvSpPr>
-          <p:cNvPr id="14" name="TextBox 13"/>
-          <p:cNvSpPr txBox="1"/>
-          <p:nvPr/>
-        </p:nvSpPr>
-        <p:spPr>
-          <a:xfrm>
-            <a:off x="4526280" y="3977640"/>
-            <a:ext cx="3063240" cy="1920240"/>
-          </a:xfrm>
-          <a:prstGeom prst="rect">
-            <a:avLst/>
-          </a:prstGeom>
-          <a:noFill/>
-        </p:spPr>
-        <p:txBody>
-          <a:bodyPr wrap="square">
-            <a:spAutoFit/>
-          </a:bodyPr>
-          <a:lstStyle/>
-          <a:p>
-            <a:pPr>
-              <a:defRPr sz="2200" b="1">
-                <a:solidFill>
-                  <a:srgbClr val="EF4444"/>
-                </a:solidFill>
-              </a:defRPr>
-            </a:pPr>
-            <a:r>
-              <a:t>Excused Leave Protection</a:t>
-            </a:r>
-          </a:p>
-          <a:p>
-            <a:pPr>
-              <a:defRPr sz="1100" b="1">
+              <a:defRPr sz="1000">
                 <a:solidFill>
                   <a:srgbClr val="F8FAFC"/>
                 </a:solidFill>
               </a:defRPr>
             </a:pPr>
             <a:r>
-              <a:t>FAIRNESS &amp; EQUITY</a:t>
+              <a:t>✔ Hysteresis Recovery Monitoring: Alert clears only when student's DVI drops below 55 for 2 consecutive weeks.</a:t>
             </a:r>
           </a:p>
           <a:p>
             <a:br/>
             <a:pPr>
-              <a:defRPr sz="950">
-                <a:solidFill>
-                  <a:srgbClr val="94A3B8"/>
-                </a:solidFill>
-              </a:defRPr>
-            </a:pPr>
-            <a:r>
-              <a:t>Approved medical and duty leaves in the ERP are mathematically masked from penalties, protecting student ambassadors.</a:t>
-            </a:r>
-          </a:p>
-        </p:txBody>
-      </p:sp>
-      <p:sp>
-        <p:nvSpPr>
-          <p:cNvPr id="15" name="Rounded Rectangle 14"/>
-          <p:cNvSpPr/>
-          <p:nvPr/>
-        </p:nvSpPr>
-        <p:spPr>
-          <a:xfrm>
-            <a:off x="7955280" y="3840480"/>
-            <a:ext cx="3429000" cy="2194560"/>
-          </a:xfrm>
-          <a:prstGeom prst="roundRect">
-            <a:avLst/>
-          </a:prstGeom>
-          <a:solidFill>
-            <a:srgbClr val="131A2B"/>
-          </a:solidFill>
-          <a:ln w="12700">
-            <a:solidFill>
-              <a:srgbClr val="F8FAFC"/>
-            </a:solidFill>
-          </a:ln>
-        </p:spPr>
-        <p:style>
-          <a:lnRef idx="1">
-            <a:schemeClr val="accent1"/>
-          </a:lnRef>
-          <a:fillRef idx="3">
-            <a:schemeClr val="accent1"/>
-          </a:fillRef>
-          <a:effectRef idx="2">
-            <a:schemeClr val="accent1"/>
-          </a:effectRef>
-          <a:fontRef idx="minor">
-            <a:schemeClr val="lt1"/>
-          </a:fontRef>
-        </p:style>
-        <p:txBody>
-          <a:bodyPr rtlCol="0" anchor="ctr"/>
-          <a:lstStyle/>
-          <a:p>
-            <a:pPr algn="ctr"/>
-          </a:p>
-        </p:txBody>
-      </p:sp>
-      <p:sp>
-        <p:nvSpPr>
-          <p:cNvPr id="16" name="TextBox 15"/>
-          <p:cNvSpPr txBox="1"/>
-          <p:nvPr/>
-        </p:nvSpPr>
-        <p:spPr>
-          <a:xfrm>
-            <a:off x="8138160" y="3977640"/>
-            <a:ext cx="3063240" cy="1920240"/>
-          </a:xfrm>
-          <a:prstGeom prst="rect">
-            <a:avLst/>
-          </a:prstGeom>
-          <a:noFill/>
-        </p:spPr>
-        <p:txBody>
-          <a:bodyPr wrap="square">
-            <a:spAutoFit/>
-          </a:bodyPr>
-          <a:lstStyle/>
-          <a:p>
-            <a:pPr>
-              <a:defRPr sz="2200" b="1">
+              <a:defRPr sz="1000">
                 <a:solidFill>
                   <a:srgbClr val="F8FAFC"/>
                 </a:solidFill>
               </a:defRPr>
             </a:pPr>
             <a:r>
-              <a:t>Privacy by Design</a:t>
-            </a:r>
-          </a:p>
-          <a:p>
-            <a:pPr>
-              <a:defRPr sz="1100" b="1">
-                <a:solidFill>
-                  <a:srgbClr val="F8FAFC"/>
-                </a:solidFill>
-              </a:defRPr>
-            </a:pPr>
-            <a:r>
-              <a:t>OPERATIONAL TELEMETRY ONLY</a:t>
-            </a:r>
-          </a:p>
-          <a:p>
-            <a:br/>
-            <a:pPr>
-              <a:defRPr sz="950">
-                <a:solidFill>
-                  <a:srgbClr val="94A3B8"/>
-                </a:solidFill>
-              </a:defRPr>
-            </a:pPr>
-            <a:r>
-              <a:t>Uses coarse institutional metadata already in the ERP (attendance, timestamps, clicks). Zero invasive webcams or screen tracking.</a:t>
+              <a:t>✔ Institutional Accountability: Provides deans with verified audit trails of proactive faculty mentorship.</a:t>
             </a:r>
           </a:p>
         </p:txBody>
@@ -5036,7 +4581,7 @@
               </a:defRPr>
             </a:pPr>
             <a:r>
-              <a:t>10. FUTURE SCOPE &amp; ROADMAP</a:t>
+              <a:t>SYSTEM TRUST &amp; SELF-MONITORING</a:t>
             </a:r>
           </a:p>
         </p:txBody>
@@ -5071,7 +4616,7 @@
               </a:defRPr>
             </a:pPr>
             <a:r>
-              <a:t>From Campus Prototype to Standard College ERP Plug-In</a:t>
+              <a:t>Closed-Loop Accuracy Tracking &amp; Solving the Expectation-Disconfirmation Dip</a:t>
             </a:r>
           </a:p>
           <a:p>
@@ -5083,7 +4628,7 @@
               </a:defRPr>
             </a:pPr>
             <a:r>
-              <a:t>A clear 3-phase commercialization and technical expansion roadmap.</a:t>
+              <a:t>The first early-warning system that tracks and displays its own perceived accuracy over time.</a:t>
             </a:r>
           </a:p>
         </p:txBody>
@@ -5097,7 +4642,286 @@
         <p:spPr>
           <a:xfrm>
             <a:off x="731520" y="1463040"/>
-            <a:ext cx="3429000" cy="4663440"/>
+            <a:ext cx="5257800" cy="2194560"/>
+          </a:xfrm>
+          <a:prstGeom prst="roundRect">
+            <a:avLst/>
+          </a:prstGeom>
+          <a:solidFill>
+            <a:srgbClr val="131A2B"/>
+          </a:solidFill>
+          <a:ln w="12700">
+            <a:solidFill>
+              <a:srgbClr val="EF4444"/>
+            </a:solidFill>
+          </a:ln>
+        </p:spPr>
+        <p:style>
+          <a:lnRef idx="1">
+            <a:schemeClr val="accent1"/>
+          </a:lnRef>
+          <a:fillRef idx="3">
+            <a:schemeClr val="accent1"/>
+          </a:fillRef>
+          <a:effectRef idx="2">
+            <a:schemeClr val="accent1"/>
+          </a:effectRef>
+          <a:fontRef idx="minor">
+            <a:schemeClr val="lt1"/>
+          </a:fontRef>
+        </p:style>
+        <p:txBody>
+          <a:bodyPr rtlCol="0" anchor="ctr"/>
+          <a:lstStyle/>
+          <a:p>
+            <a:pPr algn="ctr"/>
+          </a:p>
+        </p:txBody>
+      </p:sp>
+      <p:sp>
+        <p:nvSpPr>
+          <p:cNvPr id="6" name="TextBox 5"/>
+          <p:cNvSpPr txBox="1"/>
+          <p:nvPr/>
+        </p:nvSpPr>
+        <p:spPr>
+          <a:xfrm>
+            <a:off x="960120" y="1600200"/>
+            <a:ext cx="4800600" cy="1920240"/>
+          </a:xfrm>
+          <a:prstGeom prst="rect">
+            <a:avLst/>
+          </a:prstGeom>
+          <a:noFill/>
+        </p:spPr>
+        <p:txBody>
+          <a:bodyPr wrap="square">
+            <a:spAutoFit/>
+          </a:bodyPr>
+          <a:lstStyle/>
+          <a:p>
+            <a:pPr>
+              <a:defRPr sz="1300" b="1">
+                <a:solidFill>
+                  <a:srgbClr val="EF4444"/>
+                </a:solidFill>
+              </a:defRPr>
+            </a:pPr>
+            <a:r>
+              <a:t>The Expectation-Disconfirmation Effect</a:t>
+            </a:r>
+          </a:p>
+          <a:p>
+            <a:br/>
+            <a:pPr>
+              <a:defRPr sz="1000">
+                <a:solidFill>
+                  <a:srgbClr val="94A3B8"/>
+                </a:solidFill>
+              </a:defRPr>
+            </a:pPr>
+            <a:r>
+              <a:t>Documented in UTAUT &amp; education literature (Bhattacherjee &amp; Premkumar): Faculty adopt EWS with high hopes, but 1 or 2 early false alarms trigger a sharp trust collapse, leading to permanent abandonment. Tripwire explicitly tackles this psychological barrier.</a:t>
+            </a:r>
+          </a:p>
+        </p:txBody>
+      </p:sp>
+      <p:sp>
+        <p:nvSpPr>
+          <p:cNvPr id="7" name="Rounded Rectangle 6"/>
+          <p:cNvSpPr/>
+          <p:nvPr/>
+        </p:nvSpPr>
+        <p:spPr>
+          <a:xfrm>
+            <a:off x="6172200" y="1463040"/>
+            <a:ext cx="5257800" cy="2194560"/>
+          </a:xfrm>
+          <a:prstGeom prst="roundRect">
+            <a:avLst/>
+          </a:prstGeom>
+          <a:solidFill>
+            <a:srgbClr val="131A2B"/>
+          </a:solidFill>
+          <a:ln w="12700">
+            <a:solidFill>
+              <a:srgbClr val="0EA5E9"/>
+            </a:solidFill>
+          </a:ln>
+        </p:spPr>
+        <p:style>
+          <a:lnRef idx="1">
+            <a:schemeClr val="accent1"/>
+          </a:lnRef>
+          <a:fillRef idx="3">
+            <a:schemeClr val="accent1"/>
+          </a:fillRef>
+          <a:effectRef idx="2">
+            <a:schemeClr val="accent1"/>
+          </a:effectRef>
+          <a:fontRef idx="minor">
+            <a:schemeClr val="lt1"/>
+          </a:fontRef>
+        </p:style>
+        <p:txBody>
+          <a:bodyPr rtlCol="0" anchor="ctr"/>
+          <a:lstStyle/>
+          <a:p>
+            <a:pPr algn="ctr"/>
+          </a:p>
+        </p:txBody>
+      </p:sp>
+      <p:sp>
+        <p:nvSpPr>
+          <p:cNvPr id="8" name="TextBox 7"/>
+          <p:cNvSpPr txBox="1"/>
+          <p:nvPr/>
+        </p:nvSpPr>
+        <p:spPr>
+          <a:xfrm>
+            <a:off x="6400800" y="1600200"/>
+            <a:ext cx="4800600" cy="1920240"/>
+          </a:xfrm>
+          <a:prstGeom prst="rect">
+            <a:avLst/>
+          </a:prstGeom>
+          <a:noFill/>
+        </p:spPr>
+        <p:txBody>
+          <a:bodyPr wrap="square">
+            <a:spAutoFit/>
+          </a:bodyPr>
+          <a:lstStyle/>
+          <a:p>
+            <a:pPr>
+              <a:defRPr sz="1300" b="1">
+                <a:solidFill>
+                  <a:srgbClr val="0EA5E9"/>
+                </a:solidFill>
+              </a:defRPr>
+            </a:pPr>
+            <a:r>
+              <a:t>1-Tap Closed-Loop Mentor Verification</a:t>
+            </a:r>
+          </a:p>
+          <a:p>
+            <a:br/>
+            <a:pPr>
+              <a:defRPr sz="1000">
+                <a:solidFill>
+                  <a:srgbClr val="94A3B8"/>
+                </a:solidFill>
+              </a:defRPr>
+            </a:pPr>
+            <a:r>
+              <a:t>Following every intervention, faculty complete a 1-tap audit: Flag Accuracy (Accurate / False Alarm / Too Late / Unclear), 1–5 Actionability Rating, and optional ground-truth notes. Turns subjective faculty feedback into quantitative model telemetry.</a:t>
+            </a:r>
+          </a:p>
+        </p:txBody>
+      </p:sp>
+      <p:sp>
+        <p:nvSpPr>
+          <p:cNvPr id="9" name="Rounded Rectangle 8"/>
+          <p:cNvSpPr/>
+          <p:nvPr/>
+        </p:nvSpPr>
+        <p:spPr>
+          <a:xfrm>
+            <a:off x="731520" y="3840480"/>
+            <a:ext cx="5257800" cy="2194560"/>
+          </a:xfrm>
+          <a:prstGeom prst="roundRect">
+            <a:avLst/>
+          </a:prstGeom>
+          <a:solidFill>
+            <a:srgbClr val="131A2B"/>
+          </a:solidFill>
+          <a:ln w="12700">
+            <a:solidFill>
+              <a:srgbClr val="10B981"/>
+            </a:solidFill>
+          </a:ln>
+        </p:spPr>
+        <p:style>
+          <a:lnRef idx="1">
+            <a:schemeClr val="accent1"/>
+          </a:lnRef>
+          <a:fillRef idx="3">
+            <a:schemeClr val="accent1"/>
+          </a:fillRef>
+          <a:effectRef idx="2">
+            <a:schemeClr val="accent1"/>
+          </a:effectRef>
+          <a:fontRef idx="minor">
+            <a:schemeClr val="lt1"/>
+          </a:fontRef>
+        </p:style>
+        <p:txBody>
+          <a:bodyPr rtlCol="0" anchor="ctr"/>
+          <a:lstStyle/>
+          <a:p>
+            <a:pPr algn="ctr"/>
+          </a:p>
+        </p:txBody>
+      </p:sp>
+      <p:sp>
+        <p:nvSpPr>
+          <p:cNvPr id="10" name="TextBox 9"/>
+          <p:cNvSpPr txBox="1"/>
+          <p:nvPr/>
+        </p:nvSpPr>
+        <p:spPr>
+          <a:xfrm>
+            <a:off x="960120" y="3977640"/>
+            <a:ext cx="4800600" cy="1920240"/>
+          </a:xfrm>
+          <a:prstGeom prst="rect">
+            <a:avLst/>
+          </a:prstGeom>
+          <a:noFill/>
+        </p:spPr>
+        <p:txBody>
+          <a:bodyPr wrap="square">
+            <a:spAutoFit/>
+          </a:bodyPr>
+          <a:lstStyle/>
+          <a:p>
+            <a:pPr>
+              <a:defRPr sz="1300" b="1">
+                <a:solidFill>
+                  <a:srgbClr val="10B981"/>
+                </a:solidFill>
+              </a:defRPr>
+            </a:pPr>
+            <a:r>
+              <a:t>Composite System Trust Score (0–100)</a:t>
+            </a:r>
+          </a:p>
+          <a:p>
+            <a:br/>
+            <a:pPr>
+              <a:defRPr sz="1000">
+                <a:solidFill>
+                  <a:srgbClr val="94A3B8"/>
+                </a:solidFill>
+              </a:defRPr>
+            </a:pPr>
+            <a:r>
+              <a:t>Calculated dynamically: Trust Score = (Accurate Flags % × 0.5) + (Mean Likert Score / 5.0 × 100 × 0.5). Tracks semester trajectory across Weeks 1 to 6 (initial 70% optimism → W2-3 trough at 41.7% → W4-6 calibrated recovery to 97.5%).</a:t>
+            </a:r>
+          </a:p>
+        </p:txBody>
+      </p:sp>
+      <p:sp>
+        <p:nvSpPr>
+          <p:cNvPr id="11" name="Rounded Rectangle 10"/>
+          <p:cNvSpPr/>
+          <p:nvPr/>
+        </p:nvSpPr>
+        <p:spPr>
+          <a:xfrm>
+            <a:off x="6172200" y="3840480"/>
+            <a:ext cx="5257800" cy="2194560"/>
           </a:xfrm>
           <a:prstGeom prst="roundRect">
             <a:avLst/>
@@ -5135,14 +4959,14 @@
       </p:sp>
       <p:sp>
         <p:nvSpPr>
-          <p:cNvPr id="6" name="TextBox 5"/>
+          <p:cNvPr id="12" name="TextBox 11"/>
           <p:cNvSpPr txBox="1"/>
           <p:nvPr/>
         </p:nvSpPr>
         <p:spPr>
           <a:xfrm>
-            <a:off x="914400" y="1645920"/>
-            <a:ext cx="3063240" cy="4297680"/>
+            <a:off x="6400800" y="3977640"/>
+            <a:ext cx="4800600" cy="1920240"/>
           </a:xfrm>
           <a:prstGeom prst="rect">
             <a:avLst/>
@@ -5163,372 +4987,20 @@
               </a:defRPr>
             </a:pPr>
             <a:r>
-              <a:t>Phase 1: Delivered Prototype</a:t>
-            </a:r>
-          </a:p>
-          <a:p>
-            <a:pPr>
-              <a:defRPr sz="1000" i="1">
+              <a:t>Confidence &amp; Severity Calibration</a:t>
+            </a:r>
+          </a:p>
+          <a:p>
+            <a:br/>
+            <a:pPr>
+              <a:defRPr sz="1000">
                 <a:solidFill>
                   <a:srgbClr val="94A3B8"/>
                 </a:solidFill>
               </a:defRPr>
             </a:pPr>
             <a:r>
-              <a:t>Current Hackathon Release</a:t>
-            </a:r>
-          </a:p>
-          <a:p>
-            <a:br/>
-            <a:pPr>
-              <a:defRPr sz="950">
-                <a:solidFill>
-                  <a:srgbClr val="F8FAFC"/>
-                </a:solidFill>
-              </a:defRPr>
-            </a:pPr>
-            <a:r>
-              <a:t>• Full DVI multi-vector analytical engine</a:t>
-            </a:r>
-          </a:p>
-          <a:p>
-            <a:br/>
-            <a:pPr>
-              <a:defRPr sz="950">
-                <a:solidFill>
-                  <a:srgbClr val="F8FAFC"/>
-                </a:solidFill>
-              </a:defRPr>
-            </a:pPr>
-            <a:r>
-              <a:t>• EWMA temporal noise smoothing (alpha=0.35)</a:t>
-            </a:r>
-          </a:p>
-          <a:p>
-            <a:br/>
-            <a:pPr>
-              <a:defRPr sz="950">
-                <a:solidFill>
-                  <a:srgbClr val="F8FAFC"/>
-                </a:solidFill>
-              </a:defRPr>
-            </a:pPr>
-            <a:r>
-              <a:t>• Classroom batch attendance register with persistence</a:t>
-            </a:r>
-          </a:p>
-          <a:p>
-            <a:br/>
-            <a:pPr>
-              <a:defRPr sz="950">
-                <a:solidFill>
-                  <a:srgbClr val="F8FAFC"/>
-                </a:solidFill>
-              </a:defRPr>
-            </a:pPr>
-            <a:r>
-              <a:t>• Actionable counterfactual explainability module</a:t>
-            </a:r>
-          </a:p>
-          <a:p>
-            <a:br/>
-            <a:pPr>
-              <a:defRPr sz="950">
-                <a:solidFill>
-                  <a:srgbClr val="F8FAFC"/>
-                </a:solidFill>
-              </a:defRPr>
-            </a:pPr>
-            <a:r>
-              <a:t>• Closed-loop mentor intervention &amp; recovery tracker</a:t>
-            </a:r>
-          </a:p>
-        </p:txBody>
-      </p:sp>
-      <p:sp>
-        <p:nvSpPr>
-          <p:cNvPr id="7" name="Rounded Rectangle 6"/>
-          <p:cNvSpPr/>
-          <p:nvPr/>
-        </p:nvSpPr>
-        <p:spPr>
-          <a:xfrm>
-            <a:off x="4343400" y="1463040"/>
-            <a:ext cx="3429000" cy="4663440"/>
-          </a:xfrm>
-          <a:prstGeom prst="roundRect">
-            <a:avLst/>
-          </a:prstGeom>
-          <a:solidFill>
-            <a:srgbClr val="131A2B"/>
-          </a:solidFill>
-          <a:ln w="12700">
-            <a:solidFill>
-              <a:srgbClr val="0EA5E9"/>
-            </a:solidFill>
-          </a:ln>
-        </p:spPr>
-        <p:style>
-          <a:lnRef idx="1">
-            <a:schemeClr val="accent1"/>
-          </a:lnRef>
-          <a:fillRef idx="3">
-            <a:schemeClr val="accent1"/>
-          </a:fillRef>
-          <a:effectRef idx="2">
-            <a:schemeClr val="accent1"/>
-          </a:effectRef>
-          <a:fontRef idx="minor">
-            <a:schemeClr val="lt1"/>
-          </a:fontRef>
-        </p:style>
-        <p:txBody>
-          <a:bodyPr rtlCol="0" anchor="ctr"/>
-          <a:lstStyle/>
-          <a:p>
-            <a:pPr algn="ctr"/>
-          </a:p>
-        </p:txBody>
-      </p:sp>
-      <p:sp>
-        <p:nvSpPr>
-          <p:cNvPr id="8" name="TextBox 7"/>
-          <p:cNvSpPr txBox="1"/>
-          <p:nvPr/>
-        </p:nvSpPr>
-        <p:spPr>
-          <a:xfrm>
-            <a:off x="4526280" y="1645920"/>
-            <a:ext cx="3063240" cy="4297680"/>
-          </a:xfrm>
-          <a:prstGeom prst="rect">
-            <a:avLst/>
-          </a:prstGeom>
-          <a:noFill/>
-        </p:spPr>
-        <p:txBody>
-          <a:bodyPr wrap="square">
-            <a:spAutoFit/>
-          </a:bodyPr>
-          <a:lstStyle/>
-          <a:p>
-            <a:pPr>
-              <a:defRPr sz="1300" b="1">
-                <a:solidFill>
-                  <a:srgbClr val="0EA5E9"/>
-                </a:solidFill>
-              </a:defRPr>
-            </a:pPr>
-            <a:r>
-              <a:t>Phase 2: Native ERP Connectors</a:t>
-            </a:r>
-          </a:p>
-          <a:p>
-            <a:pPr>
-              <a:defRPr sz="1000" i="1">
-                <a:solidFill>
-                  <a:srgbClr val="94A3B8"/>
-                </a:solidFill>
-              </a:defRPr>
-            </a:pPr>
-            <a:r>
-              <a:t>Next 3 Months</a:t>
-            </a:r>
-          </a:p>
-          <a:p>
-            <a:br/>
-            <a:pPr>
-              <a:defRPr sz="950">
-                <a:solidFill>
-                  <a:srgbClr val="F8FAFC"/>
-                </a:solidFill>
-              </a:defRPr>
-            </a:pPr>
-            <a:r>
-              <a:t>• Native plug-in connectors for ETLAB, Linways &amp; CampusCare</a:t>
-            </a:r>
-          </a:p>
-          <a:p>
-            <a:br/>
-            <a:pPr>
-              <a:defRPr sz="950">
-                <a:solidFill>
-                  <a:srgbClr val="F8FAFC"/>
-                </a:solidFill>
-              </a:defRPr>
-            </a:pPr>
-            <a:r>
-              <a:t>• LTI 1.3 standard compliance for Canvas &amp; Moodle LMS</a:t>
-            </a:r>
-          </a:p>
-          <a:p>
-            <a:br/>
-            <a:pPr>
-              <a:defRPr sz="950">
-                <a:solidFill>
-                  <a:srgbClr val="F8FAFC"/>
-                </a:solidFill>
-              </a:defRPr>
-            </a:pPr>
-            <a:r>
-              <a:t>• Generative AI Mentor Outreach Copilot (Google Gemini API) to auto-draft personalized check-in emails in 1 click</a:t>
-            </a:r>
-          </a:p>
-          <a:p>
-            <a:br/>
-            <a:pPr>
-              <a:defRPr sz="950">
-                <a:solidFill>
-                  <a:srgbClr val="F8FAFC"/>
-                </a:solidFill>
-              </a:defRPr>
-            </a:pPr>
-            <a:r>
-              <a:t>• Automated WhatsApp &amp; SMS alert dispatches</a:t>
-            </a:r>
-          </a:p>
-        </p:txBody>
-      </p:sp>
-      <p:sp>
-        <p:nvSpPr>
-          <p:cNvPr id="9" name="Rounded Rectangle 8"/>
-          <p:cNvSpPr/>
-          <p:nvPr/>
-        </p:nvSpPr>
-        <p:spPr>
-          <a:xfrm>
-            <a:off x="7955280" y="1463040"/>
-            <a:ext cx="3429000" cy="4663440"/>
-          </a:xfrm>
-          <a:prstGeom prst="roundRect">
-            <a:avLst/>
-          </a:prstGeom>
-          <a:solidFill>
-            <a:srgbClr val="131A2B"/>
-          </a:solidFill>
-          <a:ln w="12700">
-            <a:solidFill>
-              <a:srgbClr val="10B981"/>
-            </a:solidFill>
-          </a:ln>
-        </p:spPr>
-        <p:style>
-          <a:lnRef idx="1">
-            <a:schemeClr val="accent1"/>
-          </a:lnRef>
-          <a:fillRef idx="3">
-            <a:schemeClr val="accent1"/>
-          </a:fillRef>
-          <a:effectRef idx="2">
-            <a:schemeClr val="accent1"/>
-          </a:effectRef>
-          <a:fontRef idx="minor">
-            <a:schemeClr val="lt1"/>
-          </a:fontRef>
-        </p:style>
-        <p:txBody>
-          <a:bodyPr rtlCol="0" anchor="ctr"/>
-          <a:lstStyle/>
-          <a:p>
-            <a:pPr algn="ctr"/>
-          </a:p>
-        </p:txBody>
-      </p:sp>
-      <p:sp>
-        <p:nvSpPr>
-          <p:cNvPr id="10" name="TextBox 9"/>
-          <p:cNvSpPr txBox="1"/>
-          <p:nvPr/>
-        </p:nvSpPr>
-        <p:spPr>
-          <a:xfrm>
-            <a:off x="8138160" y="1645920"/>
-            <a:ext cx="3063240" cy="4297680"/>
-          </a:xfrm>
-          <a:prstGeom prst="rect">
-            <a:avLst/>
-          </a:prstGeom>
-          <a:noFill/>
-        </p:spPr>
-        <p:txBody>
-          <a:bodyPr wrap="square">
-            <a:spAutoFit/>
-          </a:bodyPr>
-          <a:lstStyle/>
-          <a:p>
-            <a:pPr>
-              <a:defRPr sz="1300" b="1">
-                <a:solidFill>
-                  <a:srgbClr val="10B981"/>
-                </a:solidFill>
-              </a:defRPr>
-            </a:pPr>
-            <a:r>
-              <a:t>Phase 3: Enterprise &amp; State Scale</a:t>
-            </a:r>
-          </a:p>
-          <a:p>
-            <a:pPr>
-              <a:defRPr sz="1000" i="1">
-                <a:solidFill>
-                  <a:srgbClr val="94A3B8"/>
-                </a:solidFill>
-              </a:defRPr>
-            </a:pPr>
-            <a:r>
-              <a:t>Next 6–12 Months</a:t>
-            </a:r>
-          </a:p>
-          <a:p>
-            <a:br/>
-            <a:pPr>
-              <a:defRPr sz="950">
-                <a:solidFill>
-                  <a:srgbClr val="F8FAFC"/>
-                </a:solidFill>
-              </a:defRPr>
-            </a:pPr>
-            <a:r>
-              <a:t>• Cross-semester longitudinal retention modeling</a:t>
-            </a:r>
-          </a:p>
-          <a:p>
-            <a:br/>
-            <a:pPr>
-              <a:defRPr sz="950">
-                <a:solidFill>
-                  <a:srgbClr val="F8FAFC"/>
-                </a:solidFill>
-              </a:defRPr>
-            </a:pPr>
-            <a:r>
-              <a:t>• Departmental resource allocation &amp; workload prediction</a:t>
-            </a:r>
-          </a:p>
-          <a:p>
-            <a:br/>
-            <a:pPr>
-              <a:defRPr sz="950">
-                <a:solidFill>
-                  <a:srgbClr val="F8FAFC"/>
-                </a:solidFill>
-              </a:defRPr>
-            </a:pPr>
-            <a:r>
-              <a:t>• State-wide technical university deployment across KTU colleges</a:t>
-            </a:r>
-          </a:p>
-          <a:p>
-            <a:br/>
-            <a:pPr>
-              <a:defRPr sz="950">
-                <a:solidFill>
-                  <a:srgbClr val="F8FAFC"/>
-                </a:solidFill>
-              </a:defRPr>
-            </a:pPr>
-            <a:r>
-              <a:t>• Federated privacy-preserving machine learning models</a:t>
+              <a:t>Empirical precision proof: DVI 80–100 alerts achieve 92–100% precision with zero false alarms on normal/excused archetypes, while borderline DVI 70–79 alerts capture emergent drift requiring faculty discretion.</a:t>
             </a:r>
           </a:p>
         </p:txBody>
@@ -5624,7 +5096,7 @@
               </a:defRPr>
             </a:pPr>
             <a:r>
-              <a:t>CONCLUSION &amp; JUDGE DEFENSE</a:t>
+              <a:t>9. IMPACT &amp; USEFULNESS</a:t>
             </a:r>
           </a:p>
         </p:txBody>
@@ -5659,7 +5131,7 @@
               </a:defRPr>
             </a:pPr>
             <a:r>
-              <a:t>Why Tripwire is the Winning Educational AI Innovation</a:t>
+              <a:t>Measurable Retention ROI, Academic Equity &amp; Privacy Safeguards</a:t>
             </a:r>
           </a:p>
           <a:p>
@@ -5671,7 +5143,7 @@
               </a:defRPr>
             </a:pPr>
             <a:r>
-              <a:t>Cheat-sheet answering the toughest judge questions with technical precision.</a:t>
+              <a:t>Quantified institutional impact engineered with ethical AI principles.</a:t>
             </a:r>
           </a:p>
         </p:txBody>
@@ -5685,7 +5157,7 @@
         <p:spPr>
           <a:xfrm>
             <a:off x="731520" y="1463040"/>
-            <a:ext cx="10728655" cy="1115568"/>
+            <a:ext cx="3429000" cy="2194560"/>
           </a:xfrm>
           <a:prstGeom prst="roundRect">
             <a:avLst/>
@@ -5729,8 +5201,8 @@
         </p:nvSpPr>
         <p:spPr>
           <a:xfrm>
-            <a:off x="1005840" y="1536192"/>
-            <a:ext cx="10149840" cy="960120"/>
+            <a:off x="914400" y="1600200"/>
+            <a:ext cx="3063240" cy="1920240"/>
           </a:xfrm>
           <a:prstGeom prst="rect">
             <a:avLst/>
@@ -5744,26 +5216,39 @@
           <a:lstStyle/>
           <a:p>
             <a:pPr>
-              <a:defRPr sz="1200" b="1">
+              <a:defRPr sz="2200" b="1">
                 <a:solidFill>
                   <a:srgbClr val="6366F1"/>
                 </a:solidFill>
               </a:defRPr>
             </a:pPr>
             <a:r>
-              <a:t>Q: "Why integrate with college ERPs like ETLAB instead of replacing them?"</a:t>
-            </a:r>
-          </a:p>
-          <a:p>
+              <a:t>21–28 Days Earlier</a:t>
+            </a:r>
+          </a:p>
+          <a:p>
+            <a:pPr>
+              <a:defRPr sz="1100" b="1">
+                <a:solidFill>
+                  <a:srgbClr val="F8FAFC"/>
+                </a:solidFill>
+              </a:defRPr>
+            </a:pPr>
+            <a:r>
+              <a:t>LEAD TIME ADVANTAGE</a:t>
+            </a:r>
+          </a:p>
+          <a:p>
+            <a:br/>
             <a:pPr>
               <a:defRPr sz="950">
                 <a:solidFill>
-                  <a:srgbClr val="F8FAFC"/>
-                </a:solidFill>
-              </a:defRPr>
-            </a:pPr>
-            <a:r>
-              <a:t>A: Colleges have years of financial and institutional lock-in with ERPs like ETLAB. By sitting as an intelligent predictive plug-in rather than a disruptive replacement, Tripwire achieves zero-friction institutional adoption.</a:t>
+                  <a:srgbClr val="94A3B8"/>
+                </a:solidFill>
+              </a:defRPr>
+            </a:pPr>
+            <a:r>
+              <a:t>Detects micro-drift in 14-day rolling windows rather than waiting 90 days for midterms or end-of-term hall ticket blocks.</a:t>
             </a:r>
           </a:p>
         </p:txBody>
@@ -5776,8 +5261,8 @@
         </p:nvSpPr>
         <p:spPr>
           <a:xfrm>
-            <a:off x="731520" y="2697480"/>
-            <a:ext cx="10728655" cy="1115568"/>
+            <a:off x="4343400" y="1463040"/>
+            <a:ext cx="3429000" cy="2194560"/>
           </a:xfrm>
           <a:prstGeom prst="roundRect">
             <a:avLst/>
@@ -5821,8 +5306,8 @@
         </p:nvSpPr>
         <p:spPr>
           <a:xfrm>
-            <a:off x="1005840" y="2770632"/>
-            <a:ext cx="10149840" cy="960120"/>
+            <a:off x="4526280" y="1600200"/>
+            <a:ext cx="3063240" cy="1920240"/>
           </a:xfrm>
           <a:prstGeom prst="rect">
             <a:avLst/>
@@ -5836,26 +5321,39 @@
           <a:lstStyle/>
           <a:p>
             <a:pPr>
-              <a:defRPr sz="1200" b="1">
+              <a:defRPr sz="2200" b="1">
                 <a:solidFill>
                   <a:srgbClr val="0EA5E9"/>
                 </a:solidFill>
               </a:defRPr>
             </a:pPr>
             <a:r>
-              <a:t>Q: "Why is personal velocity better than a static 75% cutoff?"</a:t>
-            </a:r>
-          </a:p>
-          <a:p>
+              <a:t>85% Reduction</a:t>
+            </a:r>
+          </a:p>
+          <a:p>
+            <a:pPr>
+              <a:defRPr sz="1100" b="1">
+                <a:solidFill>
+                  <a:srgbClr val="F8FAFC"/>
+                </a:solidFill>
+              </a:defRPr>
+            </a:pPr>
+            <a:r>
+              <a:t>FACULTY TRIAGE OVERHEAD</a:t>
+            </a:r>
+          </a:p>
+          <a:p>
+            <a:br/>
             <a:pPr>
               <a:defRPr sz="950">
                 <a:solidFill>
-                  <a:srgbClr val="F8FAFC"/>
-                </a:solidFill>
-              </a:defRPr>
-            </a:pPr>
-            <a:r>
-              <a:t>A: Static cutoffs trigger alarms when it's already too late to recover. A student dropping from 98% to 76% in 2 weeks represents an acute crisis that static rules ignore until they cross 75%. Relative velocity catches the fire early.</a:t>
+                  <a:srgbClr val="94A3B8"/>
+                </a:solidFill>
+              </a:defRPr>
+            </a:pPr>
+            <a:r>
+              <a:t>Automated velocity scoring highlights the top 5 at-risk students out of 100 in less than 10 seconds.</a:t>
             </a:r>
           </a:p>
         </p:txBody>
@@ -5868,8 +5366,8 @@
         </p:nvSpPr>
         <p:spPr>
           <a:xfrm>
-            <a:off x="731520" y="3931920"/>
-            <a:ext cx="10728655" cy="1115568"/>
+            <a:off x="7955280" y="1463040"/>
+            <a:ext cx="3429000" cy="2194560"/>
           </a:xfrm>
           <a:prstGeom prst="roundRect">
             <a:avLst/>
@@ -5913,8 +5411,8 @@
         </p:nvSpPr>
         <p:spPr>
           <a:xfrm>
-            <a:off x="1005840" y="4005072"/>
-            <a:ext cx="10149840" cy="960120"/>
+            <a:off x="8138160" y="1600200"/>
+            <a:ext cx="3063240" cy="1920240"/>
           </a:xfrm>
           <a:prstGeom prst="rect">
             <a:avLst/>
@@ -5928,8 +5426,1356 @@
           <a:lstStyle/>
           <a:p>
             <a:pPr>
+              <a:defRPr sz="2200" b="1">
+                <a:solidFill>
+                  <a:srgbClr val="10B981"/>
+                </a:solidFill>
+              </a:defRPr>
+            </a:pPr>
+            <a:r>
+              <a:t>15–20% Reduction</a:t>
+            </a:r>
+          </a:p>
+          <a:p>
+            <a:pPr>
+              <a:defRPr sz="1100" b="1">
+                <a:solidFill>
+                  <a:srgbClr val="F8FAFC"/>
+                </a:solidFill>
+              </a:defRPr>
+            </a:pPr>
+            <a:r>
+              <a:t>AVOIDABLE DEBARMENTS</a:t>
+            </a:r>
+          </a:p>
+          <a:p>
+            <a:br/>
+            <a:pPr>
+              <a:defRPr sz="950">
+                <a:solidFill>
+                  <a:srgbClr val="94A3B8"/>
+                </a:solidFill>
+              </a:defRPr>
+            </a:pPr>
+            <a:r>
+              <a:t>Early velocity check-ins prevent students from sliding past the non-recoverable 75% university attendance threshold.</a:t>
+            </a:r>
+          </a:p>
+        </p:txBody>
+      </p:sp>
+      <p:sp>
+        <p:nvSpPr>
+          <p:cNvPr id="11" name="Rounded Rectangle 10"/>
+          <p:cNvSpPr/>
+          <p:nvPr/>
+        </p:nvSpPr>
+        <p:spPr>
+          <a:xfrm>
+            <a:off x="731520" y="3840480"/>
+            <a:ext cx="3429000" cy="2194560"/>
+          </a:xfrm>
+          <a:prstGeom prst="roundRect">
+            <a:avLst/>
+          </a:prstGeom>
+          <a:solidFill>
+            <a:srgbClr val="131A2B"/>
+          </a:solidFill>
+          <a:ln w="12700">
+            <a:solidFill>
+              <a:srgbClr val="F59E0B"/>
+            </a:solidFill>
+          </a:ln>
+        </p:spPr>
+        <p:style>
+          <a:lnRef idx="1">
+            <a:schemeClr val="accent1"/>
+          </a:lnRef>
+          <a:fillRef idx="3">
+            <a:schemeClr val="accent1"/>
+          </a:fillRef>
+          <a:effectRef idx="2">
+            <a:schemeClr val="accent1"/>
+          </a:effectRef>
+          <a:fontRef idx="minor">
+            <a:schemeClr val="lt1"/>
+          </a:fontRef>
+        </p:style>
+        <p:txBody>
+          <a:bodyPr rtlCol="0" anchor="ctr"/>
+          <a:lstStyle/>
+          <a:p>
+            <a:pPr algn="ctr"/>
+          </a:p>
+        </p:txBody>
+      </p:sp>
+      <p:sp>
+        <p:nvSpPr>
+          <p:cNvPr id="12" name="TextBox 11"/>
+          <p:cNvSpPr txBox="1"/>
+          <p:nvPr/>
+        </p:nvSpPr>
+        <p:spPr>
+          <a:xfrm>
+            <a:off x="914400" y="3977640"/>
+            <a:ext cx="3063240" cy="1920240"/>
+          </a:xfrm>
+          <a:prstGeom prst="rect">
+            <a:avLst/>
+          </a:prstGeom>
+          <a:noFill/>
+        </p:spPr>
+        <p:txBody>
+          <a:bodyPr wrap="square">
+            <a:spAutoFit/>
+          </a:bodyPr>
+          <a:lstStyle/>
+          <a:p>
+            <a:pPr>
+              <a:defRPr sz="2200" b="1">
+                <a:solidFill>
+                  <a:srgbClr val="F59E0B"/>
+                </a:solidFill>
+              </a:defRPr>
+            </a:pPr>
+            <a:r>
+              <a:t>Zero Student Stigma</a:t>
+            </a:r>
+          </a:p>
+          <a:p>
+            <a:pPr>
+              <a:defRPr sz="1100" b="1">
+                <a:solidFill>
+                  <a:srgbClr val="F8FAFC"/>
+                </a:solidFill>
+              </a:defRPr>
+            </a:pPr>
+            <a:r>
+              <a:t>DIGNITY-PRESERVING SAFETY NET</a:t>
+            </a:r>
+          </a:p>
+          <a:p>
+            <a:br/>
+            <a:pPr>
+              <a:defRPr sz="950">
+                <a:solidFill>
+                  <a:srgbClr val="94A3B8"/>
+                </a:solidFill>
+              </a:defRPr>
+            </a:pPr>
+            <a:r>
+              <a:t>Alerts are strictly private to designated mentors. Students are never shown a demoralizing public 'High Risk' badge.</a:t>
+            </a:r>
+          </a:p>
+        </p:txBody>
+      </p:sp>
+      <p:sp>
+        <p:nvSpPr>
+          <p:cNvPr id="13" name="Rounded Rectangle 12"/>
+          <p:cNvSpPr/>
+          <p:nvPr/>
+        </p:nvSpPr>
+        <p:spPr>
+          <a:xfrm>
+            <a:off x="4343400" y="3840480"/>
+            <a:ext cx="3429000" cy="2194560"/>
+          </a:xfrm>
+          <a:prstGeom prst="roundRect">
+            <a:avLst/>
+          </a:prstGeom>
+          <a:solidFill>
+            <a:srgbClr val="131A2B"/>
+          </a:solidFill>
+          <a:ln w="12700">
+            <a:solidFill>
+              <a:srgbClr val="EF4444"/>
+            </a:solidFill>
+          </a:ln>
+        </p:spPr>
+        <p:style>
+          <a:lnRef idx="1">
+            <a:schemeClr val="accent1"/>
+          </a:lnRef>
+          <a:fillRef idx="3">
+            <a:schemeClr val="accent1"/>
+          </a:fillRef>
+          <a:effectRef idx="2">
+            <a:schemeClr val="accent1"/>
+          </a:effectRef>
+          <a:fontRef idx="minor">
+            <a:schemeClr val="lt1"/>
+          </a:fontRef>
+        </p:style>
+        <p:txBody>
+          <a:bodyPr rtlCol="0" anchor="ctr"/>
+          <a:lstStyle/>
+          <a:p>
+            <a:pPr algn="ctr"/>
+          </a:p>
+        </p:txBody>
+      </p:sp>
+      <p:sp>
+        <p:nvSpPr>
+          <p:cNvPr id="14" name="TextBox 13"/>
+          <p:cNvSpPr txBox="1"/>
+          <p:nvPr/>
+        </p:nvSpPr>
+        <p:spPr>
+          <a:xfrm>
+            <a:off x="4526280" y="3977640"/>
+            <a:ext cx="3063240" cy="1920240"/>
+          </a:xfrm>
+          <a:prstGeom prst="rect">
+            <a:avLst/>
+          </a:prstGeom>
+          <a:noFill/>
+        </p:spPr>
+        <p:txBody>
+          <a:bodyPr wrap="square">
+            <a:spAutoFit/>
+          </a:bodyPr>
+          <a:lstStyle/>
+          <a:p>
+            <a:pPr>
+              <a:defRPr sz="2200" b="1">
+                <a:solidFill>
+                  <a:srgbClr val="EF4444"/>
+                </a:solidFill>
+              </a:defRPr>
+            </a:pPr>
+            <a:r>
+              <a:t>Excused Leave Protection</a:t>
+            </a:r>
+          </a:p>
+          <a:p>
+            <a:pPr>
+              <a:defRPr sz="1100" b="1">
+                <a:solidFill>
+                  <a:srgbClr val="F8FAFC"/>
+                </a:solidFill>
+              </a:defRPr>
+            </a:pPr>
+            <a:r>
+              <a:t>FAIRNESS &amp; EQUITY</a:t>
+            </a:r>
+          </a:p>
+          <a:p>
+            <a:br/>
+            <a:pPr>
+              <a:defRPr sz="950">
+                <a:solidFill>
+                  <a:srgbClr val="94A3B8"/>
+                </a:solidFill>
+              </a:defRPr>
+            </a:pPr>
+            <a:r>
+              <a:t>Approved medical and duty leaves in the ERP are mathematically masked from penalties, protecting student ambassadors.</a:t>
+            </a:r>
+          </a:p>
+        </p:txBody>
+      </p:sp>
+      <p:sp>
+        <p:nvSpPr>
+          <p:cNvPr id="15" name="Rounded Rectangle 14"/>
+          <p:cNvSpPr/>
+          <p:nvPr/>
+        </p:nvSpPr>
+        <p:spPr>
+          <a:xfrm>
+            <a:off x="7955280" y="3840480"/>
+            <a:ext cx="3429000" cy="2194560"/>
+          </a:xfrm>
+          <a:prstGeom prst="roundRect">
+            <a:avLst/>
+          </a:prstGeom>
+          <a:solidFill>
+            <a:srgbClr val="131A2B"/>
+          </a:solidFill>
+          <a:ln w="12700">
+            <a:solidFill>
+              <a:srgbClr val="F8FAFC"/>
+            </a:solidFill>
+          </a:ln>
+        </p:spPr>
+        <p:style>
+          <a:lnRef idx="1">
+            <a:schemeClr val="accent1"/>
+          </a:lnRef>
+          <a:fillRef idx="3">
+            <a:schemeClr val="accent1"/>
+          </a:fillRef>
+          <a:effectRef idx="2">
+            <a:schemeClr val="accent1"/>
+          </a:effectRef>
+          <a:fontRef idx="minor">
+            <a:schemeClr val="lt1"/>
+          </a:fontRef>
+        </p:style>
+        <p:txBody>
+          <a:bodyPr rtlCol="0" anchor="ctr"/>
+          <a:lstStyle/>
+          <a:p>
+            <a:pPr algn="ctr"/>
+          </a:p>
+        </p:txBody>
+      </p:sp>
+      <p:sp>
+        <p:nvSpPr>
+          <p:cNvPr id="16" name="TextBox 15"/>
+          <p:cNvSpPr txBox="1"/>
+          <p:nvPr/>
+        </p:nvSpPr>
+        <p:spPr>
+          <a:xfrm>
+            <a:off x="8138160" y="3977640"/>
+            <a:ext cx="3063240" cy="1920240"/>
+          </a:xfrm>
+          <a:prstGeom prst="rect">
+            <a:avLst/>
+          </a:prstGeom>
+          <a:noFill/>
+        </p:spPr>
+        <p:txBody>
+          <a:bodyPr wrap="square">
+            <a:spAutoFit/>
+          </a:bodyPr>
+          <a:lstStyle/>
+          <a:p>
+            <a:pPr>
+              <a:defRPr sz="2200" b="1">
+                <a:solidFill>
+                  <a:srgbClr val="F8FAFC"/>
+                </a:solidFill>
+              </a:defRPr>
+            </a:pPr>
+            <a:r>
+              <a:t>Privacy by Design</a:t>
+            </a:r>
+          </a:p>
+          <a:p>
+            <a:pPr>
+              <a:defRPr sz="1100" b="1">
+                <a:solidFill>
+                  <a:srgbClr val="F8FAFC"/>
+                </a:solidFill>
+              </a:defRPr>
+            </a:pPr>
+            <a:r>
+              <a:t>OPERATIONAL TELEMETRY ONLY</a:t>
+            </a:r>
+          </a:p>
+          <a:p>
+            <a:br/>
+            <a:pPr>
+              <a:defRPr sz="950">
+                <a:solidFill>
+                  <a:srgbClr val="94A3B8"/>
+                </a:solidFill>
+              </a:defRPr>
+            </a:pPr>
+            <a:r>
+              <a:t>Uses coarse institutional metadata already in the ERP (attendance, timestamps, clicks). Zero invasive webcams or screen tracking.</a:t>
+            </a:r>
+          </a:p>
+        </p:txBody>
+      </p:sp>
+    </p:spTree>
+  </p:cSld>
+  <p:clrMapOvr>
+    <a:masterClrMapping/>
+  </p:clrMapOvr>
+</p:sld>
+</file>
+
+<file path=ppt/slides/slide16.xml><?xml version="1.0" encoding="utf-8"?>
+<p:sld xmlns:a="http://schemas.openxmlformats.org/drawingml/2006/main" xmlns:p="http://schemas.openxmlformats.org/presentationml/2006/main" xmlns:r="http://schemas.openxmlformats.org/officeDocument/2006/relationships">
+  <p:cSld>
+    <p:spTree>
+      <p:nvGrpSpPr>
+        <p:cNvPr id="1" name=""/>
+        <p:cNvGrpSpPr/>
+        <p:nvPr/>
+      </p:nvGrpSpPr>
+      <p:grpSpPr/>
+      <p:sp>
+        <p:nvSpPr>
+          <p:cNvPr id="2" name="Rectangle 1"/>
+          <p:cNvSpPr/>
+          <p:nvPr/>
+        </p:nvSpPr>
+        <p:spPr>
+          <a:xfrm>
+            <a:off x="0" y="0"/>
+            <a:ext cx="12191695" cy="6858000"/>
+          </a:xfrm>
+          <a:prstGeom prst="rect">
+            <a:avLst/>
+          </a:prstGeom>
+          <a:solidFill>
+            <a:srgbClr val="0B0F19"/>
+          </a:solidFill>
+          <a:ln>
+            <a:noFill/>
+          </a:ln>
+        </p:spPr>
+        <p:style>
+          <a:lnRef idx="1">
+            <a:schemeClr val="accent1"/>
+          </a:lnRef>
+          <a:fillRef idx="3">
+            <a:schemeClr val="accent1"/>
+          </a:fillRef>
+          <a:effectRef idx="2">
+            <a:schemeClr val="accent1"/>
+          </a:effectRef>
+          <a:fontRef idx="minor">
+            <a:schemeClr val="lt1"/>
+          </a:fontRef>
+        </p:style>
+        <p:txBody>
+          <a:bodyPr rtlCol="0" anchor="ctr"/>
+          <a:lstStyle/>
+          <a:p>
+            <a:pPr algn="ctr"/>
+          </a:p>
+        </p:txBody>
+      </p:sp>
+      <p:sp>
+        <p:nvSpPr>
+          <p:cNvPr id="3" name="TextBox 2"/>
+          <p:cNvSpPr txBox="1"/>
+          <p:nvPr/>
+        </p:nvSpPr>
+        <p:spPr>
+          <a:xfrm>
+            <a:off x="731520" y="365760"/>
+            <a:ext cx="10698480" cy="320040"/>
+          </a:xfrm>
+          <a:prstGeom prst="rect">
+            <a:avLst/>
+          </a:prstGeom>
+          <a:noFill/>
+        </p:spPr>
+        <p:txBody>
+          <a:bodyPr wrap="square">
+            <a:spAutoFit/>
+          </a:bodyPr>
+          <a:lstStyle/>
+          <a:p>
+            <a:pPr>
+              <a:defRPr sz="1100" b="1">
+                <a:solidFill>
+                  <a:srgbClr val="6366F1"/>
+                </a:solidFill>
+              </a:defRPr>
+            </a:pPr>
+            <a:r>
+              <a:t>10. FUTURE SCOPE &amp; ROADMAP</a:t>
+            </a:r>
+          </a:p>
+        </p:txBody>
+      </p:sp>
+      <p:sp>
+        <p:nvSpPr>
+          <p:cNvPr id="4" name="TextBox 3"/>
+          <p:cNvSpPr txBox="1"/>
+          <p:nvPr/>
+        </p:nvSpPr>
+        <p:spPr>
+          <a:xfrm>
+            <a:off x="731520" y="658368"/>
+            <a:ext cx="10698480" cy="594360"/>
+          </a:xfrm>
+          <a:prstGeom prst="rect">
+            <a:avLst/>
+          </a:prstGeom>
+          <a:noFill/>
+        </p:spPr>
+        <p:txBody>
+          <a:bodyPr wrap="square">
+            <a:spAutoFit/>
+          </a:bodyPr>
+          <a:lstStyle/>
+          <a:p>
+            <a:pPr>
+              <a:defRPr sz="2200" b="1">
+                <a:solidFill>
+                  <a:srgbClr val="F8FAFC"/>
+                </a:solidFill>
+              </a:defRPr>
+            </a:pPr>
+            <a:r>
+              <a:t>From Campus Prototype to Standard College ERP Plug-In</a:t>
+            </a:r>
+          </a:p>
+          <a:p>
+            <a:pPr>
+              <a:defRPr sz="1150">
+                <a:solidFill>
+                  <a:srgbClr val="94A3B8"/>
+                </a:solidFill>
+              </a:defRPr>
+            </a:pPr>
+            <a:r>
+              <a:t>A clear 3-phase commercialization and technical expansion roadmap.</a:t>
+            </a:r>
+          </a:p>
+        </p:txBody>
+      </p:sp>
+      <p:sp>
+        <p:nvSpPr>
+          <p:cNvPr id="5" name="Rounded Rectangle 4"/>
+          <p:cNvSpPr/>
+          <p:nvPr/>
+        </p:nvSpPr>
+        <p:spPr>
+          <a:xfrm>
+            <a:off x="731520" y="1463040"/>
+            <a:ext cx="3429000" cy="4663440"/>
+          </a:xfrm>
+          <a:prstGeom prst="roundRect">
+            <a:avLst/>
+          </a:prstGeom>
+          <a:solidFill>
+            <a:srgbClr val="131A2B"/>
+          </a:solidFill>
+          <a:ln w="12700">
+            <a:solidFill>
+              <a:srgbClr val="6366F1"/>
+            </a:solidFill>
+          </a:ln>
+        </p:spPr>
+        <p:style>
+          <a:lnRef idx="1">
+            <a:schemeClr val="accent1"/>
+          </a:lnRef>
+          <a:fillRef idx="3">
+            <a:schemeClr val="accent1"/>
+          </a:fillRef>
+          <a:effectRef idx="2">
+            <a:schemeClr val="accent1"/>
+          </a:effectRef>
+          <a:fontRef idx="minor">
+            <a:schemeClr val="lt1"/>
+          </a:fontRef>
+        </p:style>
+        <p:txBody>
+          <a:bodyPr rtlCol="0" anchor="ctr"/>
+          <a:lstStyle/>
+          <a:p>
+            <a:pPr algn="ctr"/>
+          </a:p>
+        </p:txBody>
+      </p:sp>
+      <p:sp>
+        <p:nvSpPr>
+          <p:cNvPr id="6" name="TextBox 5"/>
+          <p:cNvSpPr txBox="1"/>
+          <p:nvPr/>
+        </p:nvSpPr>
+        <p:spPr>
+          <a:xfrm>
+            <a:off x="914400" y="1645920"/>
+            <a:ext cx="3063240" cy="4297680"/>
+          </a:xfrm>
+          <a:prstGeom prst="rect">
+            <a:avLst/>
+          </a:prstGeom>
+          <a:noFill/>
+        </p:spPr>
+        <p:txBody>
+          <a:bodyPr wrap="square">
+            <a:spAutoFit/>
+          </a:bodyPr>
+          <a:lstStyle/>
+          <a:p>
+            <a:pPr>
+              <a:defRPr sz="1300" b="1">
+                <a:solidFill>
+                  <a:srgbClr val="6366F1"/>
+                </a:solidFill>
+              </a:defRPr>
+            </a:pPr>
+            <a:r>
+              <a:t>Phase 1: Delivered Prototype</a:t>
+            </a:r>
+          </a:p>
+          <a:p>
+            <a:pPr>
+              <a:defRPr sz="1000" i="1">
+                <a:solidFill>
+                  <a:srgbClr val="94A3B8"/>
+                </a:solidFill>
+              </a:defRPr>
+            </a:pPr>
+            <a:r>
+              <a:t>Current Hackathon Release</a:t>
+            </a:r>
+          </a:p>
+          <a:p>
+            <a:br/>
+            <a:pPr>
+              <a:defRPr sz="950">
+                <a:solidFill>
+                  <a:srgbClr val="F8FAFC"/>
+                </a:solidFill>
+              </a:defRPr>
+            </a:pPr>
+            <a:r>
+              <a:t>• Full DVI multi-vector analytical engine (4 components)</a:t>
+            </a:r>
+          </a:p>
+          <a:p>
+            <a:br/>
+            <a:pPr>
+              <a:defRPr sz="950">
+                <a:solidFill>
+                  <a:srgbClr val="F8FAFC"/>
+                </a:solidFill>
+              </a:defRPr>
+            </a:pPr>
+            <a:r>
+              <a:t>• EWMA temporal noise smoothing (alpha=0.30)</a:t>
+            </a:r>
+          </a:p>
+          <a:p>
+            <a:br/>
+            <a:pPr>
+              <a:defRPr sz="950">
+                <a:solidFill>
+                  <a:srgbClr val="F8FAFC"/>
+                </a:solidFill>
+              </a:defRPr>
+            </a:pPr>
+            <a:r>
+              <a:t>• Classroom batch attendance register with state persistence</a:t>
+            </a:r>
+          </a:p>
+          <a:p>
+            <a:br/>
+            <a:pPr>
+              <a:defRPr sz="950">
+                <a:solidFill>
+                  <a:srgbClr val="F8FAFC"/>
+                </a:solidFill>
+              </a:defRPr>
+            </a:pPr>
+            <a:r>
+              <a:t>• Actionable counterfactual explainability module</a:t>
+            </a:r>
+          </a:p>
+          <a:p>
+            <a:br/>
+            <a:pPr>
+              <a:defRPr sz="950">
+                <a:solidFill>
+                  <a:srgbClr val="F8FAFC"/>
+                </a:solidFill>
+              </a:defRPr>
+            </a:pPr>
+            <a:r>
+              <a:t>• Closed-loop mentor intervention &amp; recovery tracker</a:t>
+            </a:r>
+          </a:p>
+          <a:p>
+            <a:br/>
+            <a:pPr>
+              <a:defRPr sz="950">
+                <a:solidFill>
+                  <a:srgbClr val="F8FAFC"/>
+                </a:solidFill>
+              </a:defRPr>
+            </a:pPr>
+            <a:r>
+              <a:t>• Self-monitoring system trust &amp; accuracy metrics</a:t>
+            </a:r>
+          </a:p>
+        </p:txBody>
+      </p:sp>
+      <p:sp>
+        <p:nvSpPr>
+          <p:cNvPr id="7" name="Rounded Rectangle 6"/>
+          <p:cNvSpPr/>
+          <p:nvPr/>
+        </p:nvSpPr>
+        <p:spPr>
+          <a:xfrm>
+            <a:off x="4343400" y="1463040"/>
+            <a:ext cx="3429000" cy="4663440"/>
+          </a:xfrm>
+          <a:prstGeom prst="roundRect">
+            <a:avLst/>
+          </a:prstGeom>
+          <a:solidFill>
+            <a:srgbClr val="131A2B"/>
+          </a:solidFill>
+          <a:ln w="12700">
+            <a:solidFill>
+              <a:srgbClr val="0EA5E9"/>
+            </a:solidFill>
+          </a:ln>
+        </p:spPr>
+        <p:style>
+          <a:lnRef idx="1">
+            <a:schemeClr val="accent1"/>
+          </a:lnRef>
+          <a:fillRef idx="3">
+            <a:schemeClr val="accent1"/>
+          </a:fillRef>
+          <a:effectRef idx="2">
+            <a:schemeClr val="accent1"/>
+          </a:effectRef>
+          <a:fontRef idx="minor">
+            <a:schemeClr val="lt1"/>
+          </a:fontRef>
+        </p:style>
+        <p:txBody>
+          <a:bodyPr rtlCol="0" anchor="ctr"/>
+          <a:lstStyle/>
+          <a:p>
+            <a:pPr algn="ctr"/>
+          </a:p>
+        </p:txBody>
+      </p:sp>
+      <p:sp>
+        <p:nvSpPr>
+          <p:cNvPr id="8" name="TextBox 7"/>
+          <p:cNvSpPr txBox="1"/>
+          <p:nvPr/>
+        </p:nvSpPr>
+        <p:spPr>
+          <a:xfrm>
+            <a:off x="4526280" y="1645920"/>
+            <a:ext cx="3063240" cy="4297680"/>
+          </a:xfrm>
+          <a:prstGeom prst="rect">
+            <a:avLst/>
+          </a:prstGeom>
+          <a:noFill/>
+        </p:spPr>
+        <p:txBody>
+          <a:bodyPr wrap="square">
+            <a:spAutoFit/>
+          </a:bodyPr>
+          <a:lstStyle/>
+          <a:p>
+            <a:pPr>
+              <a:defRPr sz="1300" b="1">
+                <a:solidFill>
+                  <a:srgbClr val="0EA5E9"/>
+                </a:solidFill>
+              </a:defRPr>
+            </a:pPr>
+            <a:r>
+              <a:t>Phase 2: Native ERP Connectors</a:t>
+            </a:r>
+          </a:p>
+          <a:p>
+            <a:pPr>
+              <a:defRPr sz="1000" i="1">
+                <a:solidFill>
+                  <a:srgbClr val="94A3B8"/>
+                </a:solidFill>
+              </a:defRPr>
+            </a:pPr>
+            <a:r>
+              <a:t>Next 3 Months</a:t>
+            </a:r>
+          </a:p>
+          <a:p>
+            <a:br/>
+            <a:pPr>
+              <a:defRPr sz="950">
+                <a:solidFill>
+                  <a:srgbClr val="F8FAFC"/>
+                </a:solidFill>
+              </a:defRPr>
+            </a:pPr>
+            <a:r>
+              <a:t>• Native plug-in connectors for ETLAB, Linways &amp; CampusCare</a:t>
+            </a:r>
+          </a:p>
+          <a:p>
+            <a:br/>
+            <a:pPr>
+              <a:defRPr sz="950">
+                <a:solidFill>
+                  <a:srgbClr val="F8FAFC"/>
+                </a:solidFill>
+              </a:defRPr>
+            </a:pPr>
+            <a:r>
+              <a:t>• LTI 1.3 standard compliance for Canvas &amp; Moodle LMS</a:t>
+            </a:r>
+          </a:p>
+          <a:p>
+            <a:br/>
+            <a:pPr>
+              <a:defRPr sz="950">
+                <a:solidFill>
+                  <a:srgbClr val="F8FAFC"/>
+                </a:solidFill>
+              </a:defRPr>
+            </a:pPr>
+            <a:r>
+              <a:t>• Generative AI Mentor Outreach Copilot (Google Gemini API) to auto-draft personalized check-in emails in 1 click</a:t>
+            </a:r>
+          </a:p>
+          <a:p>
+            <a:br/>
+            <a:pPr>
+              <a:defRPr sz="950">
+                <a:solidFill>
+                  <a:srgbClr val="F8FAFC"/>
+                </a:solidFill>
+              </a:defRPr>
+            </a:pPr>
+            <a:r>
+              <a:t>• Automated WhatsApp &amp; SMS alert dispatches</a:t>
+            </a:r>
+          </a:p>
+        </p:txBody>
+      </p:sp>
+      <p:sp>
+        <p:nvSpPr>
+          <p:cNvPr id="9" name="Rounded Rectangle 8"/>
+          <p:cNvSpPr/>
+          <p:nvPr/>
+        </p:nvSpPr>
+        <p:spPr>
+          <a:xfrm>
+            <a:off x="7955280" y="1463040"/>
+            <a:ext cx="3429000" cy="4663440"/>
+          </a:xfrm>
+          <a:prstGeom prst="roundRect">
+            <a:avLst/>
+          </a:prstGeom>
+          <a:solidFill>
+            <a:srgbClr val="131A2B"/>
+          </a:solidFill>
+          <a:ln w="12700">
+            <a:solidFill>
+              <a:srgbClr val="10B981"/>
+            </a:solidFill>
+          </a:ln>
+        </p:spPr>
+        <p:style>
+          <a:lnRef idx="1">
+            <a:schemeClr val="accent1"/>
+          </a:lnRef>
+          <a:fillRef idx="3">
+            <a:schemeClr val="accent1"/>
+          </a:fillRef>
+          <a:effectRef idx="2">
+            <a:schemeClr val="accent1"/>
+          </a:effectRef>
+          <a:fontRef idx="minor">
+            <a:schemeClr val="lt1"/>
+          </a:fontRef>
+        </p:style>
+        <p:txBody>
+          <a:bodyPr rtlCol="0" anchor="ctr"/>
+          <a:lstStyle/>
+          <a:p>
+            <a:pPr algn="ctr"/>
+          </a:p>
+        </p:txBody>
+      </p:sp>
+      <p:sp>
+        <p:nvSpPr>
+          <p:cNvPr id="10" name="TextBox 9"/>
+          <p:cNvSpPr txBox="1"/>
+          <p:nvPr/>
+        </p:nvSpPr>
+        <p:spPr>
+          <a:xfrm>
+            <a:off x="8138160" y="1645920"/>
+            <a:ext cx="3063240" cy="4297680"/>
+          </a:xfrm>
+          <a:prstGeom prst="rect">
+            <a:avLst/>
+          </a:prstGeom>
+          <a:noFill/>
+        </p:spPr>
+        <p:txBody>
+          <a:bodyPr wrap="square">
+            <a:spAutoFit/>
+          </a:bodyPr>
+          <a:lstStyle/>
+          <a:p>
+            <a:pPr>
+              <a:defRPr sz="1300" b="1">
+                <a:solidFill>
+                  <a:srgbClr val="10B981"/>
+                </a:solidFill>
+              </a:defRPr>
+            </a:pPr>
+            <a:r>
+              <a:t>Phase 3: Enterprise &amp; State Scale</a:t>
+            </a:r>
+          </a:p>
+          <a:p>
+            <a:pPr>
+              <a:defRPr sz="1000" i="1">
+                <a:solidFill>
+                  <a:srgbClr val="94A3B8"/>
+                </a:solidFill>
+              </a:defRPr>
+            </a:pPr>
+            <a:r>
+              <a:t>Next 6–12 Months</a:t>
+            </a:r>
+          </a:p>
+          <a:p>
+            <a:br/>
+            <a:pPr>
+              <a:defRPr sz="950">
+                <a:solidFill>
+                  <a:srgbClr val="F8FAFC"/>
+                </a:solidFill>
+              </a:defRPr>
+            </a:pPr>
+            <a:r>
+              <a:t>• Cross-semester longitudinal retention modeling</a:t>
+            </a:r>
+          </a:p>
+          <a:p>
+            <a:br/>
+            <a:pPr>
+              <a:defRPr sz="950">
+                <a:solidFill>
+                  <a:srgbClr val="F8FAFC"/>
+                </a:solidFill>
+              </a:defRPr>
+            </a:pPr>
+            <a:r>
+              <a:t>• Departmental resource allocation &amp; workload prediction</a:t>
+            </a:r>
+          </a:p>
+          <a:p>
+            <a:br/>
+            <a:pPr>
+              <a:defRPr sz="950">
+                <a:solidFill>
+                  <a:srgbClr val="F8FAFC"/>
+                </a:solidFill>
+              </a:defRPr>
+            </a:pPr>
+            <a:r>
+              <a:t>• State-wide technical university deployment across KTU colleges</a:t>
+            </a:r>
+          </a:p>
+          <a:p>
+            <a:br/>
+            <a:pPr>
+              <a:defRPr sz="950">
+                <a:solidFill>
+                  <a:srgbClr val="F8FAFC"/>
+                </a:solidFill>
+              </a:defRPr>
+            </a:pPr>
+            <a:r>
+              <a:t>• Federated privacy-preserving machine learning models</a:t>
+            </a:r>
+          </a:p>
+        </p:txBody>
+      </p:sp>
+    </p:spTree>
+  </p:cSld>
+  <p:clrMapOvr>
+    <a:masterClrMapping/>
+  </p:clrMapOvr>
+</p:sld>
+</file>
+
+<file path=ppt/slides/slide17.xml><?xml version="1.0" encoding="utf-8"?>
+<p:sld xmlns:a="http://schemas.openxmlformats.org/drawingml/2006/main" xmlns:p="http://schemas.openxmlformats.org/presentationml/2006/main" xmlns:r="http://schemas.openxmlformats.org/officeDocument/2006/relationships">
+  <p:cSld>
+    <p:spTree>
+      <p:nvGrpSpPr>
+        <p:cNvPr id="1" name=""/>
+        <p:cNvGrpSpPr/>
+        <p:nvPr/>
+      </p:nvGrpSpPr>
+      <p:grpSpPr/>
+      <p:sp>
+        <p:nvSpPr>
+          <p:cNvPr id="2" name="Rectangle 1"/>
+          <p:cNvSpPr/>
+          <p:nvPr/>
+        </p:nvSpPr>
+        <p:spPr>
+          <a:xfrm>
+            <a:off x="0" y="0"/>
+            <a:ext cx="12191695" cy="6858000"/>
+          </a:xfrm>
+          <a:prstGeom prst="rect">
+            <a:avLst/>
+          </a:prstGeom>
+          <a:solidFill>
+            <a:srgbClr val="0B0F19"/>
+          </a:solidFill>
+          <a:ln>
+            <a:noFill/>
+          </a:ln>
+        </p:spPr>
+        <p:style>
+          <a:lnRef idx="1">
+            <a:schemeClr val="accent1"/>
+          </a:lnRef>
+          <a:fillRef idx="3">
+            <a:schemeClr val="accent1"/>
+          </a:fillRef>
+          <a:effectRef idx="2">
+            <a:schemeClr val="accent1"/>
+          </a:effectRef>
+          <a:fontRef idx="minor">
+            <a:schemeClr val="lt1"/>
+          </a:fontRef>
+        </p:style>
+        <p:txBody>
+          <a:bodyPr rtlCol="0" anchor="ctr"/>
+          <a:lstStyle/>
+          <a:p>
+            <a:pPr algn="ctr"/>
+          </a:p>
+        </p:txBody>
+      </p:sp>
+      <p:sp>
+        <p:nvSpPr>
+          <p:cNvPr id="3" name="TextBox 2"/>
+          <p:cNvSpPr txBox="1"/>
+          <p:nvPr/>
+        </p:nvSpPr>
+        <p:spPr>
+          <a:xfrm>
+            <a:off x="731520" y="365760"/>
+            <a:ext cx="10698480" cy="320040"/>
+          </a:xfrm>
+          <a:prstGeom prst="rect">
+            <a:avLst/>
+          </a:prstGeom>
+          <a:noFill/>
+        </p:spPr>
+        <p:txBody>
+          <a:bodyPr wrap="square">
+            <a:spAutoFit/>
+          </a:bodyPr>
+          <a:lstStyle/>
+          <a:p>
+            <a:pPr>
+              <a:defRPr sz="1100" b="1">
+                <a:solidFill>
+                  <a:srgbClr val="6366F1"/>
+                </a:solidFill>
+              </a:defRPr>
+            </a:pPr>
+            <a:r>
+              <a:t>CONCLUSION &amp; JUDGE DEFENSE</a:t>
+            </a:r>
+          </a:p>
+        </p:txBody>
+      </p:sp>
+      <p:sp>
+        <p:nvSpPr>
+          <p:cNvPr id="4" name="TextBox 3"/>
+          <p:cNvSpPr txBox="1"/>
+          <p:nvPr/>
+        </p:nvSpPr>
+        <p:spPr>
+          <a:xfrm>
+            <a:off x="731520" y="658368"/>
+            <a:ext cx="10698480" cy="594360"/>
+          </a:xfrm>
+          <a:prstGeom prst="rect">
+            <a:avLst/>
+          </a:prstGeom>
+          <a:noFill/>
+        </p:spPr>
+        <p:txBody>
+          <a:bodyPr wrap="square">
+            <a:spAutoFit/>
+          </a:bodyPr>
+          <a:lstStyle/>
+          <a:p>
+            <a:pPr>
+              <a:defRPr sz="2200" b="1">
+                <a:solidFill>
+                  <a:srgbClr val="F8FAFC"/>
+                </a:solidFill>
+              </a:defRPr>
+            </a:pPr>
+            <a:r>
+              <a:t>Why Tripwire is the Winning Educational AI Innovation</a:t>
+            </a:r>
+          </a:p>
+          <a:p>
+            <a:pPr>
+              <a:defRPr sz="1150">
+                <a:solidFill>
+                  <a:srgbClr val="94A3B8"/>
+                </a:solidFill>
+              </a:defRPr>
+            </a:pPr>
+            <a:r>
+              <a:t>Cheat-sheet answering the toughest judge questions with technical precision.</a:t>
+            </a:r>
+          </a:p>
+        </p:txBody>
+      </p:sp>
+      <p:sp>
+        <p:nvSpPr>
+          <p:cNvPr id="5" name="Rounded Rectangle 4"/>
+          <p:cNvSpPr/>
+          <p:nvPr/>
+        </p:nvSpPr>
+        <p:spPr>
+          <a:xfrm>
+            <a:off x="731520" y="1463040"/>
+            <a:ext cx="10728655" cy="1115568"/>
+          </a:xfrm>
+          <a:prstGeom prst="roundRect">
+            <a:avLst/>
+          </a:prstGeom>
+          <a:solidFill>
+            <a:srgbClr val="131A2B"/>
+          </a:solidFill>
+          <a:ln w="12700">
+            <a:solidFill>
+              <a:srgbClr val="6366F1"/>
+            </a:solidFill>
+          </a:ln>
+        </p:spPr>
+        <p:style>
+          <a:lnRef idx="1">
+            <a:schemeClr val="accent1"/>
+          </a:lnRef>
+          <a:fillRef idx="3">
+            <a:schemeClr val="accent1"/>
+          </a:fillRef>
+          <a:effectRef idx="2">
+            <a:schemeClr val="accent1"/>
+          </a:effectRef>
+          <a:fontRef idx="minor">
+            <a:schemeClr val="lt1"/>
+          </a:fontRef>
+        </p:style>
+        <p:txBody>
+          <a:bodyPr rtlCol="0" anchor="ctr"/>
+          <a:lstStyle/>
+          <a:p>
+            <a:pPr algn="ctr"/>
+          </a:p>
+        </p:txBody>
+      </p:sp>
+      <p:sp>
+        <p:nvSpPr>
+          <p:cNvPr id="6" name="TextBox 5"/>
+          <p:cNvSpPr txBox="1"/>
+          <p:nvPr/>
+        </p:nvSpPr>
+        <p:spPr>
+          <a:xfrm>
+            <a:off x="1005840" y="1536192"/>
+            <a:ext cx="10149840" cy="960120"/>
+          </a:xfrm>
+          <a:prstGeom prst="rect">
+            <a:avLst/>
+          </a:prstGeom>
+          <a:noFill/>
+        </p:spPr>
+        <p:txBody>
+          <a:bodyPr wrap="square">
+            <a:spAutoFit/>
+          </a:bodyPr>
+          <a:lstStyle/>
+          <a:p>
+            <a:pPr>
               <a:defRPr sz="1200" b="1">
                 <a:solidFill>
+                  <a:srgbClr val="6366F1"/>
+                </a:solidFill>
+              </a:defRPr>
+            </a:pPr>
+            <a:r>
+              <a:t>Q: "Why integrate with college ERPs like ETLAB instead of replacing them?"</a:t>
+            </a:r>
+          </a:p>
+          <a:p>
+            <a:pPr>
+              <a:defRPr sz="950">
+                <a:solidFill>
+                  <a:srgbClr val="F8FAFC"/>
+                </a:solidFill>
+              </a:defRPr>
+            </a:pPr>
+            <a:r>
+              <a:t>A: Colleges have years of institutional lock-in with ERPs like ETLAB. By sitting as an intelligent predictive plug-in rather than a disruptive replacement, Tripwire achieves zero-friction institutional adoption.</a:t>
+            </a:r>
+          </a:p>
+        </p:txBody>
+      </p:sp>
+      <p:sp>
+        <p:nvSpPr>
+          <p:cNvPr id="7" name="Rounded Rectangle 6"/>
+          <p:cNvSpPr/>
+          <p:nvPr/>
+        </p:nvSpPr>
+        <p:spPr>
+          <a:xfrm>
+            <a:off x="731520" y="2697480"/>
+            <a:ext cx="10728655" cy="1115568"/>
+          </a:xfrm>
+          <a:prstGeom prst="roundRect">
+            <a:avLst/>
+          </a:prstGeom>
+          <a:solidFill>
+            <a:srgbClr val="131A2B"/>
+          </a:solidFill>
+          <a:ln w="12700">
+            <a:solidFill>
+              <a:srgbClr val="0EA5E9"/>
+            </a:solidFill>
+          </a:ln>
+        </p:spPr>
+        <p:style>
+          <a:lnRef idx="1">
+            <a:schemeClr val="accent1"/>
+          </a:lnRef>
+          <a:fillRef idx="3">
+            <a:schemeClr val="accent1"/>
+          </a:fillRef>
+          <a:effectRef idx="2">
+            <a:schemeClr val="accent1"/>
+          </a:effectRef>
+          <a:fontRef idx="minor">
+            <a:schemeClr val="lt1"/>
+          </a:fontRef>
+        </p:style>
+        <p:txBody>
+          <a:bodyPr rtlCol="0" anchor="ctr"/>
+          <a:lstStyle/>
+          <a:p>
+            <a:pPr algn="ctr"/>
+          </a:p>
+        </p:txBody>
+      </p:sp>
+      <p:sp>
+        <p:nvSpPr>
+          <p:cNvPr id="8" name="TextBox 7"/>
+          <p:cNvSpPr txBox="1"/>
+          <p:nvPr/>
+        </p:nvSpPr>
+        <p:spPr>
+          <a:xfrm>
+            <a:off x="1005840" y="2770632"/>
+            <a:ext cx="10149840" cy="960120"/>
+          </a:xfrm>
+          <a:prstGeom prst="rect">
+            <a:avLst/>
+          </a:prstGeom>
+          <a:noFill/>
+        </p:spPr>
+        <p:txBody>
+          <a:bodyPr wrap="square">
+            <a:spAutoFit/>
+          </a:bodyPr>
+          <a:lstStyle/>
+          <a:p>
+            <a:pPr>
+              <a:defRPr sz="1200" b="1">
+                <a:solidFill>
+                  <a:srgbClr val="0EA5E9"/>
+                </a:solidFill>
+              </a:defRPr>
+            </a:pPr>
+            <a:r>
+              <a:t>Q: "Why is personal velocity better than a static 75% cutoff?"</a:t>
+            </a:r>
+          </a:p>
+          <a:p>
+            <a:pPr>
+              <a:defRPr sz="950">
+                <a:solidFill>
+                  <a:srgbClr val="F8FAFC"/>
+                </a:solidFill>
+              </a:defRPr>
+            </a:pPr>
+            <a:r>
+              <a:t>A: Static cutoffs trigger alarms when it's already too late to recover. A student dropping from 98% to 76% in 2 weeks represents an acute crisis that static rules ignore until they cross 75%. Relative velocity catches the fire early.</a:t>
+            </a:r>
+          </a:p>
+        </p:txBody>
+      </p:sp>
+      <p:sp>
+        <p:nvSpPr>
+          <p:cNvPr id="9" name="Rounded Rectangle 8"/>
+          <p:cNvSpPr/>
+          <p:nvPr/>
+        </p:nvSpPr>
+        <p:spPr>
+          <a:xfrm>
+            <a:off x="731520" y="3931920"/>
+            <a:ext cx="10728655" cy="1115568"/>
+          </a:xfrm>
+          <a:prstGeom prst="roundRect">
+            <a:avLst/>
+          </a:prstGeom>
+          <a:solidFill>
+            <a:srgbClr val="131A2B"/>
+          </a:solidFill>
+          <a:ln w="12700">
+            <a:solidFill>
+              <a:srgbClr val="10B981"/>
+            </a:solidFill>
+          </a:ln>
+        </p:spPr>
+        <p:style>
+          <a:lnRef idx="1">
+            <a:schemeClr val="accent1"/>
+          </a:lnRef>
+          <a:fillRef idx="3">
+            <a:schemeClr val="accent1"/>
+          </a:fillRef>
+          <a:effectRef idx="2">
+            <a:schemeClr val="accent1"/>
+          </a:effectRef>
+          <a:fontRef idx="minor">
+            <a:schemeClr val="lt1"/>
+          </a:fontRef>
+        </p:style>
+        <p:txBody>
+          <a:bodyPr rtlCol="0" anchor="ctr"/>
+          <a:lstStyle/>
+          <a:p>
+            <a:pPr algn="ctr"/>
+          </a:p>
+        </p:txBody>
+      </p:sp>
+      <p:sp>
+        <p:nvSpPr>
+          <p:cNvPr id="10" name="TextBox 9"/>
+          <p:cNvSpPr txBox="1"/>
+          <p:nvPr/>
+        </p:nvSpPr>
+        <p:spPr>
+          <a:xfrm>
+            <a:off x="1005840" y="4005072"/>
+            <a:ext cx="10149840" cy="960120"/>
+          </a:xfrm>
+          <a:prstGeom prst="rect">
+            <a:avLst/>
+          </a:prstGeom>
+          <a:noFill/>
+        </p:spPr>
+        <p:txBody>
+          <a:bodyPr wrap="square">
+            <a:spAutoFit/>
+          </a:bodyPr>
+          <a:lstStyle/>
+          <a:p>
+            <a:pPr>
+              <a:defRPr sz="1200" b="1">
+                <a:solidFill>
                   <a:srgbClr val="10B981"/>
                 </a:solidFill>
               </a:defRPr>
@@ -5947,7 +6793,7 @@
               </a:defRPr>
             </a:pPr>
             <a:r>
-              <a:t>A: Our EWMA noise-smoothing filter (alpha=0.35) mathematically suppresses transient shocks. An alert strictly requires sustained multi-week decline across multiple operational dimensions before firing.</a:t>
+              <a:t>A: Our EWMA noise-smoothing filter (alpha=0.30) mathematically suppresses transient shocks. An alert strictly requires sustained multi-week decline across multiple operational dimensions before firing.</a:t>
             </a:r>
           </a:p>
         </p:txBody>
@@ -6312,7 +7158,7 @@
               </a:defRPr>
             </a:pPr>
             <a:r>
-              <a:t>  Current campus ERPs (like ETLAB, Linways) merely act as digital databases. They log period attendance and Series exam marks passively, but have zero predictive analytics.</a:t>
+              <a:t>  Current campus ERPs (ETLAB, Linways) merely act as digital databases. They log period attendance and Series exam marks passively, but lack predictive velocity modeling.</a:t>
             </a:r>
           </a:p>
           <a:p>
@@ -6337,7 +7183,7 @@
               </a:defRPr>
             </a:pPr>
             <a:r>
-              <a:t>  Faculty and students only discover debarment status 48 hours before final exams when hall tickets are blocked—when it is mathematically impossible to attend enough classes to recover.</a:t>
+              <a:t>  Faculty and students discover debarment status 48 hours before final exams when hall tickets are blocked—when it is mathematically impossible to attend enough classes to recover.</a:t>
             </a:r>
           </a:p>
           <a:p>
@@ -6350,7 +7196,7 @@
               </a:defRPr>
             </a:pPr>
             <a:r>
-              <a:t>• The Cost: </a:t>
+              <a:t>• The Dropout Cost: </a:t>
             </a:r>
           </a:p>
           <a:p>
@@ -7200,7 +8046,7 @@
               </a:defRPr>
             </a:pPr>
             <a:r>
-              <a:t>Why Standard College ERPs (Like ETLAB) &amp; Generic EWS Fall Short</a:t>
+              <a:t>Why Standard College ERPs (ETLAB) &amp; Generic EWS Fall Short</a:t>
             </a:r>
           </a:p>
           <a:p>
@@ -7807,7 +8653,7 @@
               </a:defRPr>
             </a:pPr>
             <a:r>
-              <a:t>HOW TRIPWIRE INTEGRATES WITH STANDARD COLLEGE ERPs (ETLAB, LINWAYS)</a:t>
+              <a:t>HOW TRIPWIRE SUPERCHARGES STANDARD CAMPUS SYSTEMS (ETLAB / LINWAYS)</a:t>
             </a:r>
           </a:p>
           <a:p>
@@ -7832,7 +8678,7 @@
               </a:defRPr>
             </a:pPr>
             <a:r>
-              <a:t>   Colleges do not need to replace their existing ERP (ETLAB/Linways). Tripwire sits as an intelligent microservice layer, continuously ingesting period attendance, assignment submission logs, and approved medical leaves via standard APIs or batch sync.</a:t>
+              <a:t>   Colleges keep their existing ERP. Tripwire sits as an intelligent microservice layer, continuously ingesting period attendance, Series Exam marks, assignment submission logs, and approved medical leaves via standard REST APIs or CSV sync.</a:t>
             </a:r>
           </a:p>
           <a:p>
@@ -7845,7 +8691,7 @@
               </a:defRPr>
             </a:pPr>
             <a:r>
-              <a:t>✔ The Dynamic Velocity Index (DVI): </a:t>
+              <a:t>✔ The Disengagement Velocity Index (DVI): </a:t>
             </a:r>
           </a:p>
           <a:p>
@@ -7857,7 +8703,7 @@
               </a:defRPr>
             </a:pPr>
             <a:r>
-              <a:t>   Replaces blunt universal cutoffs with personal baseline modeling. Evaluates relative rate-of-change across 3 rolling vectors: Attendance Drift (40%), Submission Delay Drift (35%), and LMS Engagement Drift (25%).</a:t>
+              <a:t>   Replaces blunt static cutoffs with individual baseline drift modeling: DVI = (0.30 × Series Exam Drift) + (0.30 × Attendance Drift) + (0.30 × Submission Delay Drift) + (0.10 × LMS Engagement Drift). Normalized 0–100 scale.</a:t>
             </a:r>
           </a:p>
           <a:p>
@@ -7882,7 +8728,7 @@
               </a:defRPr>
             </a:pPr>
             <a:r>
-              <a:t>   Exponentially Weighted Moving Average smoothing (alpha=0.35) filters out 1-off transient shocks (flu, single exam week) while isolating genuine, sustained multi-week behavioral decline.</a:t>
+              <a:t>   Exponentially Weighted Moving Average smoothing (alpha=0.30) filters out 1-off transient shocks (flu, single hectic week) while isolating genuine, sustained multi-week behavioral decline.</a:t>
             </a:r>
           </a:p>
           <a:p>
@@ -8028,7 +8874,7 @@
               </a:defRPr>
             </a:pPr>
             <a:r>
-              <a:t>5. INNOVATION / UNIQUE CONTRIBUTION</a:t>
+              <a:t>ACADEMIC CRITERIA &amp; STATUTORY COMPLIANCE</a:t>
             </a:r>
           </a:p>
         </p:txBody>
@@ -8063,7 +8909,7 @@
               </a:defRPr>
             </a:pPr>
             <a:r>
-              <a:t>Four Algorithmic Breakthroughs in Student Drift Detection</a:t>
+              <a:t>Connecting Behavioral Drift to University Exam Eligibility &amp; Debarment Rules</a:t>
             </a:r>
           </a:p>
           <a:p>
@@ -8075,7 +8921,7 @@
               </a:defRPr>
             </a:pPr>
             <a:r>
-              <a:t>Moving beyond simple heuristics to production-grade, mathematically defensible AI.</a:t>
+              <a:t>Bridging the gap between real-time behavioral telemetry and statutory KTU / ERP criteria.</a:t>
             </a:r>
           </a:p>
         </p:txBody>
@@ -8089,7 +8935,7 @@
         <p:spPr>
           <a:xfrm>
             <a:off x="731520" y="1463040"/>
-            <a:ext cx="10728655" cy="1115568"/>
+            <a:ext cx="5257800" cy="2194560"/>
           </a:xfrm>
           <a:prstGeom prst="roundRect">
             <a:avLst/>
@@ -8099,7 +8945,7 @@
           </a:solidFill>
           <a:ln w="12700">
             <a:solidFill>
-              <a:srgbClr val="6366F1"/>
+              <a:srgbClr val="EF4444"/>
             </a:solidFill>
           </a:ln>
         </p:spPr>
@@ -8133,8 +8979,8 @@
         </p:nvSpPr>
         <p:spPr>
           <a:xfrm>
-            <a:off x="1005840" y="1536192"/>
-            <a:ext cx="10149840" cy="960120"/>
+            <a:off x="960120" y="1600200"/>
+            <a:ext cx="4800600" cy="1920240"/>
           </a:xfrm>
           <a:prstGeom prst="rect">
             <a:avLst/>
@@ -8150,24 +8996,25 @@
             <a:pPr>
               <a:defRPr sz="1300" b="1">
                 <a:solidFill>
-                  <a:srgbClr val="6366F1"/>
-                </a:solidFill>
-              </a:defRPr>
-            </a:pPr>
-            <a:r>
-              <a:t>1. Personal Baselines &amp; EWMA Smoothing</a:t>
-            </a:r>
-          </a:p>
-          <a:p>
-            <a:pPr>
-              <a:defRPr sz="950">
-                <a:solidFill>
-                  <a:srgbClr val="F8FAFC"/>
-                </a:solidFill>
-              </a:defRPr>
-            </a:pPr>
-            <a:r>
-              <a:t>Instead of rigid cutoffs, Tripwire calibrates a student's personal baseline over initial telemetry. It applies Exponentially Weighted Moving Average (EWMA, alpha=0.35) temporal smoothing: S_t = alpha*X_t + (1-alpha)*S_{t-1}. Transient illnesses produce zero false alarms, while sustained 2-week decay triggers immediate triage.</a:t>
+                  <a:srgbClr val="EF4444"/>
+                </a:solidFill>
+              </a:defRPr>
+            </a:pPr>
+            <a:r>
+              <a:t>Statutory Attendance Cutoff (&gt;= 75.0%)</a:t>
+            </a:r>
+          </a:p>
+          <a:p>
+            <a:br/>
+            <a:pPr>
+              <a:defRPr sz="1050">
+                <a:solidFill>
+                  <a:srgbClr val="94A3B8"/>
+                </a:solidFill>
+              </a:defRPr>
+            </a:pPr>
+            <a:r>
+              <a:t>Technical university regulations (KTU) mandate &gt;= 75% attendance for semester exam registration. Tripwire monitors this boundary continuously, alerting mentors when velocity indicates a student is on trajectory to breach 75% weeks before hall tickets close.</a:t>
             </a:r>
           </a:p>
         </p:txBody>
@@ -8180,8 +9027,101 @@
         </p:nvSpPr>
         <p:spPr>
           <a:xfrm>
-            <a:off x="731520" y="2697480"/>
-            <a:ext cx="10728655" cy="1115568"/>
+            <a:off x="6172200" y="1463040"/>
+            <a:ext cx="5257800" cy="2194560"/>
+          </a:xfrm>
+          <a:prstGeom prst="roundRect">
+            <a:avLst/>
+          </a:prstGeom>
+          <a:solidFill>
+            <a:srgbClr val="131A2B"/>
+          </a:solidFill>
+          <a:ln w="12700">
+            <a:solidFill>
+              <a:srgbClr val="F59E0B"/>
+            </a:solidFill>
+          </a:ln>
+        </p:spPr>
+        <p:style>
+          <a:lnRef idx="1">
+            <a:schemeClr val="accent1"/>
+          </a:lnRef>
+          <a:fillRef idx="3">
+            <a:schemeClr val="accent1"/>
+          </a:fillRef>
+          <a:effectRef idx="2">
+            <a:schemeClr val="accent1"/>
+          </a:effectRef>
+          <a:fontRef idx="minor">
+            <a:schemeClr val="lt1"/>
+          </a:fontRef>
+        </p:style>
+        <p:txBody>
+          <a:bodyPr rtlCol="0" anchor="ctr"/>
+          <a:lstStyle/>
+          <a:p>
+            <a:pPr algn="ctr"/>
+          </a:p>
+        </p:txBody>
+      </p:sp>
+      <p:sp>
+        <p:nvSpPr>
+          <p:cNvPr id="8" name="TextBox 7"/>
+          <p:cNvSpPr txBox="1"/>
+          <p:nvPr/>
+        </p:nvSpPr>
+        <p:spPr>
+          <a:xfrm>
+            <a:off x="6400800" y="1600200"/>
+            <a:ext cx="4800600" cy="1920240"/>
+          </a:xfrm>
+          <a:prstGeom prst="rect">
+            <a:avLst/>
+          </a:prstGeom>
+          <a:noFill/>
+        </p:spPr>
+        <p:txBody>
+          <a:bodyPr wrap="square">
+            <a:spAutoFit/>
+          </a:bodyPr>
+          <a:lstStyle/>
+          <a:p>
+            <a:pPr>
+              <a:defRPr sz="1300" b="1">
+                <a:solidFill>
+                  <a:srgbClr val="F59E0B"/>
+                </a:solidFill>
+              </a:defRPr>
+            </a:pPr>
+            <a:r>
+              <a:t>Series Exam Qualifying Benchmark (&gt;= 45.0%)</a:t>
+            </a:r>
+          </a:p>
+          <a:p>
+            <a:br/>
+            <a:pPr>
+              <a:defRPr sz="1050">
+                <a:solidFill>
+                  <a:srgbClr val="94A3B8"/>
+                </a:solidFill>
+              </a:defRPr>
+            </a:pPr>
+            <a:r>
+              <a:t>Series exams serve as the primary internal benchmark. Tripwire tracks Series mark drift (30% DVI weight) against student personal baseline, catching sudden academic drops even if attendance remains acceptable.</a:t>
+            </a:r>
+          </a:p>
+        </p:txBody>
+      </p:sp>
+      <p:sp>
+        <p:nvSpPr>
+          <p:cNvPr id="9" name="Rounded Rectangle 8"/>
+          <p:cNvSpPr/>
+          <p:nvPr/>
+        </p:nvSpPr>
+        <p:spPr>
+          <a:xfrm>
+            <a:off x="731520" y="3840480"/>
+            <a:ext cx="5257800" cy="2194560"/>
           </a:xfrm>
           <a:prstGeom prst="roundRect">
             <a:avLst/>
@@ -8219,14 +9159,14 @@
       </p:sp>
       <p:sp>
         <p:nvSpPr>
-          <p:cNvPr id="8" name="TextBox 7"/>
+          <p:cNvPr id="10" name="TextBox 9"/>
           <p:cNvSpPr txBox="1"/>
           <p:nvPr/>
         </p:nvSpPr>
         <p:spPr>
           <a:xfrm>
-            <a:off x="1005840" y="2770632"/>
-            <a:ext cx="10149840" cy="960120"/>
+            <a:off x="960120" y="3977640"/>
+            <a:ext cx="4800600" cy="1920240"/>
           </a:xfrm>
           <a:prstGeom prst="rect">
             <a:avLst/>
@@ -8247,33 +9187,34 @@
               </a:defRPr>
             </a:pPr>
             <a:r>
-              <a:t>2. Bayesian Cold-Start Prior Blending</a:t>
-            </a:r>
-          </a:p>
-          <a:p>
-            <a:pPr>
-              <a:defRPr sz="950">
-                <a:solidFill>
-                  <a:srgbClr val="F8FAFC"/>
-                </a:solidFill>
-              </a:defRPr>
-            </a:pPr>
-            <a:r>
-              <a:t>Solves the first-year or transfer student 'blank slate' problem. For students with &lt; 3 weeks of historical data, Tripwire blends individual data with cohort medians using Bayesian priors: Effective_Baseline = w*Student_Base + (1-w)*Cohort_Median. Eliminates early-semester blindspots.</a:t>
-            </a:r>
-          </a:p>
-        </p:txBody>
-      </p:sp>
-      <p:sp>
-        <p:nvSpPr>
-          <p:cNvPr id="9" name="Rounded Rectangle 8"/>
+              <a:t>CIE Passing Mark Standard (&gt;= 40.0%)</a:t>
+            </a:r>
+          </a:p>
+          <a:p>
+            <a:br/>
+            <a:pPr>
+              <a:defRPr sz="1050">
+                <a:solidFill>
+                  <a:srgbClr val="94A3B8"/>
+                </a:solidFill>
+              </a:defRPr>
+            </a:pPr>
+            <a:r>
+              <a:t>Continuous Internal Evaluation requires &gt;= 40% to qualify for final exams. Tripwire projects expected CIE marks based on behavioral velocity, identifying mark shortfalls long before semester mark sheets freeze.</a:t>
+            </a:r>
+          </a:p>
+        </p:txBody>
+      </p:sp>
+      <p:sp>
+        <p:nvSpPr>
+          <p:cNvPr id="11" name="Rounded Rectangle 10"/>
           <p:cNvSpPr/>
           <p:nvPr/>
         </p:nvSpPr>
         <p:spPr>
           <a:xfrm>
-            <a:off x="731520" y="3931920"/>
-            <a:ext cx="10728655" cy="1115568"/>
+            <a:off x="6172200" y="3840480"/>
+            <a:ext cx="5257800" cy="2194560"/>
           </a:xfrm>
           <a:prstGeom prst="roundRect">
             <a:avLst/>
@@ -8311,14 +9252,14 @@
       </p:sp>
       <p:sp>
         <p:nvSpPr>
-          <p:cNvPr id="10" name="TextBox 9"/>
+          <p:cNvPr id="12" name="TextBox 11"/>
           <p:cNvSpPr txBox="1"/>
           <p:nvPr/>
         </p:nvSpPr>
         <p:spPr>
           <a:xfrm>
-            <a:off x="1005840" y="4005072"/>
-            <a:ext cx="10149840" cy="960120"/>
+            <a:off x="6400800" y="3977640"/>
+            <a:ext cx="4800600" cy="1920240"/>
           </a:xfrm>
           <a:prstGeom prst="rect">
             <a:avLst/>
@@ -8339,111 +9280,20 @@
               </a:defRPr>
             </a:pPr>
             <a:r>
-              <a:t>3. Approved Duty-Leave Mathematical Masking</a:t>
-            </a:r>
-          </a:p>
-          <a:p>
-            <a:pPr>
-              <a:defRPr sz="950">
-                <a:solidFill>
-                  <a:srgbClr val="F8FAFC"/>
-                </a:solidFill>
-              </a:defRPr>
-            </a:pPr>
-            <a:r>
-              <a:t>Unlike standard ERPs that record duty leaves as unexcused absences until manual end-of-term audit, Tripwire ingests approved leaves directly from the ERP. Verified medical/hackathon dates are mathematically excluded from drift penalties. Campus achievers are never penalized.</a:t>
-            </a:r>
-          </a:p>
-        </p:txBody>
-      </p:sp>
-      <p:sp>
-        <p:nvSpPr>
-          <p:cNvPr id="11" name="Rounded Rectangle 10"/>
-          <p:cNvSpPr/>
-          <p:nvPr/>
-        </p:nvSpPr>
-        <p:spPr>
-          <a:xfrm>
-            <a:off x="731520" y="5166360"/>
-            <a:ext cx="10728655" cy="1115568"/>
-          </a:xfrm>
-          <a:prstGeom prst="roundRect">
-            <a:avLst/>
-          </a:prstGeom>
-          <a:solidFill>
-            <a:srgbClr val="131A2B"/>
-          </a:solidFill>
-          <a:ln w="12700">
-            <a:solidFill>
-              <a:srgbClr val="F59E0B"/>
-            </a:solidFill>
-          </a:ln>
-        </p:spPr>
-        <p:style>
-          <a:lnRef idx="1">
-            <a:schemeClr val="accent1"/>
-          </a:lnRef>
-          <a:fillRef idx="3">
-            <a:schemeClr val="accent1"/>
-          </a:fillRef>
-          <a:effectRef idx="2">
-            <a:schemeClr val="accent1"/>
-          </a:effectRef>
-          <a:fontRef idx="minor">
-            <a:schemeClr val="lt1"/>
-          </a:fontRef>
-        </p:style>
-        <p:txBody>
-          <a:bodyPr rtlCol="0" anchor="ctr"/>
-          <a:lstStyle/>
-          <a:p>
-            <a:pPr algn="ctr"/>
-          </a:p>
-        </p:txBody>
-      </p:sp>
-      <p:sp>
-        <p:nvSpPr>
-          <p:cNvPr id="12" name="TextBox 11"/>
-          <p:cNvSpPr txBox="1"/>
-          <p:nvPr/>
-        </p:nvSpPr>
-        <p:spPr>
-          <a:xfrm>
-            <a:off x="1005840" y="5239512"/>
-            <a:ext cx="10149840" cy="960120"/>
-          </a:xfrm>
-          <a:prstGeom prst="rect">
-            <a:avLst/>
-          </a:prstGeom>
-          <a:noFill/>
-        </p:spPr>
-        <p:txBody>
-          <a:bodyPr wrap="square">
-            <a:spAutoFit/>
-          </a:bodyPr>
-          <a:lstStyle/>
-          <a:p>
-            <a:pPr>
-              <a:defRPr sz="1300" b="1">
-                <a:solidFill>
-                  <a:srgbClr val="F59E0B"/>
-                </a:solidFill>
-              </a:defRPr>
-            </a:pPr>
-            <a:r>
-              <a:t>4. Actionable Counterfactual Explainability (XAI)</a:t>
-            </a:r>
-          </a:p>
-          <a:p>
-            <a:pPr>
-              <a:defRPr sz="950">
-                <a:solidFill>
-                  <a:srgbClr val="F8FAFC"/>
-                </a:solidFill>
-              </a:defRPr>
-            </a:pPr>
-            <a:r>
-              <a:t>Grounded in Wachter et al. (2017) counterfactual theory: x* = argmin d(x, x') s.t. f(x') &lt; threshold. Tripwire computes the minimal feasible behavioral changes required to clear the alert, giving faculty mentors hopeful, constructive guidance instead of punitive warnings.</a:t>
+              <a:t>DVI Risk Escalation Thresholds</a:t>
+            </a:r>
+          </a:p>
+          <a:p>
+            <a:br/>
+            <a:pPr>
+              <a:defRPr sz="1050">
+                <a:solidFill>
+                  <a:srgbClr val="94A3B8"/>
+                </a:solidFill>
+              </a:defRPr>
+            </a:pPr>
+            <a:r>
+              <a:t>Deterministic 4-tier decision support: DVI &gt;= 70 (Tripwire Critical - Debarment/Failure Imminent); DVI 50–69 (Monitoring - CIE Vulnerability); DVI 35–49 (Watch - Academic Drift); DVI &lt; 35 (Normal Standing).</a:t>
             </a:r>
           </a:p>
         </p:txBody>
@@ -8539,7 +9389,7 @@
               </a:defRPr>
             </a:pPr>
             <a:r>
-              <a:t>6. SYSTEM / SOLUTION ARCHITECTURE</a:t>
+              <a:t>5. INNOVATION / UNIQUE CONTRIBUTION</a:t>
             </a:r>
           </a:p>
         </p:txBody>
@@ -8574,7 +9424,7 @@
               </a:defRPr>
             </a:pPr>
             <a:r>
-              <a:t>How Tripwire Integrates with College ERP Infrastructure</a:t>
+              <a:t>Five Algorithmic Breakthroughs in Student Drift Detection</a:t>
             </a:r>
           </a:p>
           <a:p>
@@ -8586,7 +9436,7 @@
               </a:defRPr>
             </a:pPr>
             <a:r>
-              <a:t>A lightweight, high-speed telemetry pipeline connecting institutional databases to mentor decision support.</a:t>
+              <a:t>Moving beyond simple heuristics to production-grade, mathematically defensible AI.</a:t>
             </a:r>
           </a:p>
         </p:txBody>
@@ -8600,7 +9450,99 @@
         <p:spPr>
           <a:xfrm>
             <a:off x="731520" y="1463040"/>
-            <a:ext cx="2468880" cy="4663440"/>
+            <a:ext cx="10728655" cy="896112"/>
+          </a:xfrm>
+          <a:prstGeom prst="roundRect">
+            <a:avLst/>
+          </a:prstGeom>
+          <a:solidFill>
+            <a:srgbClr val="131A2B"/>
+          </a:solidFill>
+          <a:ln w="12700">
+            <a:solidFill>
+              <a:srgbClr val="6366F1"/>
+            </a:solidFill>
+          </a:ln>
+        </p:spPr>
+        <p:style>
+          <a:lnRef idx="1">
+            <a:schemeClr val="accent1"/>
+          </a:lnRef>
+          <a:fillRef idx="3">
+            <a:schemeClr val="accent1"/>
+          </a:fillRef>
+          <a:effectRef idx="2">
+            <a:schemeClr val="accent1"/>
+          </a:effectRef>
+          <a:fontRef idx="minor">
+            <a:schemeClr val="lt1"/>
+          </a:fontRef>
+        </p:style>
+        <p:txBody>
+          <a:bodyPr rtlCol="0" anchor="ctr"/>
+          <a:lstStyle/>
+          <a:p>
+            <a:pPr algn="ctr"/>
+          </a:p>
+        </p:txBody>
+      </p:sp>
+      <p:sp>
+        <p:nvSpPr>
+          <p:cNvPr id="6" name="TextBox 5"/>
+          <p:cNvSpPr txBox="1"/>
+          <p:nvPr/>
+        </p:nvSpPr>
+        <p:spPr>
+          <a:xfrm>
+            <a:off x="1005840" y="1517904"/>
+            <a:ext cx="10149840" cy="777240"/>
+          </a:xfrm>
+          <a:prstGeom prst="rect">
+            <a:avLst/>
+          </a:prstGeom>
+          <a:noFill/>
+        </p:spPr>
+        <p:txBody>
+          <a:bodyPr wrap="square">
+            <a:spAutoFit/>
+          </a:bodyPr>
+          <a:lstStyle/>
+          <a:p>
+            <a:pPr>
+              <a:defRPr sz="1200" b="1">
+                <a:solidFill>
+                  <a:srgbClr val="6366F1"/>
+                </a:solidFill>
+              </a:defRPr>
+            </a:pPr>
+            <a:r>
+              <a:t>1. Personal Baselines &amp; EWMA Smoothing</a:t>
+            </a:r>
+          </a:p>
+          <a:p>
+            <a:pPr>
+              <a:defRPr sz="950">
+                <a:solidFill>
+                  <a:srgbClr val="F8FAFC"/>
+                </a:solidFill>
+              </a:defRPr>
+            </a:pPr>
+            <a:r>
+              <a:t>Instead of rigid cutoffs, Tripwire calibrates a student's personal baseline over initial telemetry. It applies Exponentially Weighted Moving Average (EWMA, alpha=0.30) temporal smoothing: S_t = alpha*X_t + (1-alpha)*S_{t-1}. Transient illnesses produce zero false alarms, while sustained 2-week decay triggers immediate triage.</a:t>
+            </a:r>
+          </a:p>
+        </p:txBody>
+      </p:sp>
+      <p:sp>
+        <p:nvSpPr>
+          <p:cNvPr id="7" name="Rounded Rectangle 6"/>
+          <p:cNvSpPr/>
+          <p:nvPr/>
+        </p:nvSpPr>
+        <p:spPr>
+          <a:xfrm>
+            <a:off x="731520" y="2423160"/>
+            <a:ext cx="10728655" cy="896112"/>
           </a:xfrm>
           <a:prstGeom prst="roundRect">
             <a:avLst/>
@@ -8638,14 +9580,14 @@
       </p:sp>
       <p:sp>
         <p:nvSpPr>
-          <p:cNvPr id="6" name="TextBox 5"/>
+          <p:cNvPr id="8" name="TextBox 7"/>
           <p:cNvSpPr txBox="1"/>
           <p:nvPr/>
         </p:nvSpPr>
         <p:spPr>
           <a:xfrm>
-            <a:off x="868680" y="1645920"/>
-            <a:ext cx="2194560" cy="4297680"/>
+            <a:off x="1005840" y="2478024"/>
+            <a:ext cx="10149840" cy="777240"/>
           </a:xfrm>
           <a:prstGeom prst="rect">
             <a:avLst/>
@@ -8658,251 +9600,27 @@
           </a:bodyPr>
           <a:lstStyle/>
           <a:p>
-            <a:pPr algn="ctr">
-              <a:defRPr sz="1300" b="1">
+            <a:pPr>
+              <a:defRPr sz="1200" b="1">
                 <a:solidFill>
                   <a:srgbClr val="0EA5E9"/>
                 </a:solidFill>
               </a:defRPr>
             </a:pPr>
             <a:r>
-              <a:t>COLLEGE ERP DATA LAYER</a:t>
-            </a:r>
-          </a:p>
-          <a:p>
-            <a:pPr algn="ctr">
-              <a:defRPr sz="1000">
+              <a:t>2. Bayesian Cold-Start Prior Blending</a:t>
+            </a:r>
+          </a:p>
+          <a:p>
+            <a:pPr>
+              <a:defRPr sz="950">
                 <a:solidFill>
                   <a:srgbClr val="F8FAFC"/>
                 </a:solidFill>
               </a:defRPr>
             </a:pPr>
-            <a:br/>
-            <a:r>
-              <a:t>Standard College ERP</a:t>
-            </a:r>
-          </a:p>
-          <a:p>
-            <a:pPr algn="ctr">
-              <a:defRPr sz="1000">
-                <a:solidFill>
-                  <a:srgbClr val="F8FAFC"/>
-                </a:solidFill>
-              </a:defRPr>
-            </a:pPr>
-            <a:br/>
-            <a:r>
-              <a:t>(ETLAB / Linways / SIS)</a:t>
-            </a:r>
-          </a:p>
-          <a:p>
-            <a:pPr algn="ctr">
-              <a:defRPr sz="1000">
-                <a:solidFill>
-                  <a:srgbClr val="F8FAFC"/>
-                </a:solidFill>
-              </a:defRPr>
-            </a:pPr>
-            <a:br/>
-            <a:r>
-              <a:t>• Daily Period Attendance (1–6)</a:t>
-            </a:r>
-          </a:p>
-          <a:p>
-            <a:pPr algn="ctr">
-              <a:defRPr sz="1000">
-                <a:solidFill>
-                  <a:srgbClr val="F8FAFC"/>
-                </a:solidFill>
-              </a:defRPr>
-            </a:pPr>
-            <a:br/>
-            <a:r>
-              <a:t>• Assignment Submission Logs</a:t>
-            </a:r>
-          </a:p>
-          <a:p>
-            <a:pPr algn="ctr">
-              <a:defRPr sz="1000">
-                <a:solidFill>
-                  <a:srgbClr val="F8FAFC"/>
-                </a:solidFill>
-              </a:defRPr>
-            </a:pPr>
-            <a:br/>
-            <a:r>
-              <a:t>• LMS Activity Counters</a:t>
-            </a:r>
-          </a:p>
-          <a:p>
-            <a:pPr algn="ctr">
-              <a:defRPr sz="1000">
-                <a:solidFill>
-                  <a:srgbClr val="F8FAFC"/>
-                </a:solidFill>
-              </a:defRPr>
-            </a:pPr>
-            <a:br/>
-            <a:r>
-              <a:t>• Approved Medical Leaves</a:t>
-            </a:r>
-          </a:p>
-        </p:txBody>
-      </p:sp>
-      <p:sp>
-        <p:nvSpPr>
-          <p:cNvPr id="7" name="Rounded Rectangle 6"/>
-          <p:cNvSpPr/>
-          <p:nvPr/>
-        </p:nvSpPr>
-        <p:spPr>
-          <a:xfrm>
-            <a:off x="3429000" y="1463040"/>
-            <a:ext cx="2560320" cy="4663440"/>
-          </a:xfrm>
-          <a:prstGeom prst="roundRect">
-            <a:avLst/>
-          </a:prstGeom>
-          <a:solidFill>
-            <a:srgbClr val="131A2B"/>
-          </a:solidFill>
-          <a:ln w="12700">
-            <a:solidFill>
-              <a:srgbClr val="6366F1"/>
-            </a:solidFill>
-          </a:ln>
-        </p:spPr>
-        <p:style>
-          <a:lnRef idx="1">
-            <a:schemeClr val="accent1"/>
-          </a:lnRef>
-          <a:fillRef idx="3">
-            <a:schemeClr val="accent1"/>
-          </a:fillRef>
-          <a:effectRef idx="2">
-            <a:schemeClr val="accent1"/>
-          </a:effectRef>
-          <a:fontRef idx="minor">
-            <a:schemeClr val="lt1"/>
-          </a:fontRef>
-        </p:style>
-        <p:txBody>
-          <a:bodyPr rtlCol="0" anchor="ctr"/>
-          <a:lstStyle/>
-          <a:p>
-            <a:pPr algn="ctr"/>
-          </a:p>
-        </p:txBody>
-      </p:sp>
-      <p:sp>
-        <p:nvSpPr>
-          <p:cNvPr id="8" name="TextBox 7"/>
-          <p:cNvSpPr txBox="1"/>
-          <p:nvPr/>
-        </p:nvSpPr>
-        <p:spPr>
-          <a:xfrm>
-            <a:off x="3566160" y="1645920"/>
-            <a:ext cx="2286000" cy="4297680"/>
-          </a:xfrm>
-          <a:prstGeom prst="rect">
-            <a:avLst/>
-          </a:prstGeom>
-          <a:noFill/>
-        </p:spPr>
-        <p:txBody>
-          <a:bodyPr wrap="square">
-            <a:spAutoFit/>
-          </a:bodyPr>
-          <a:lstStyle/>
-          <a:p>
-            <a:pPr algn="ctr">
-              <a:defRPr sz="1300" b="1">
-                <a:solidFill>
-                  <a:srgbClr val="6366F1"/>
-                </a:solidFill>
-              </a:defRPr>
-            </a:pPr>
-            <a:r>
-              <a:t>INGESTION &amp; PERSISTENCE</a:t>
-            </a:r>
-          </a:p>
-          <a:p>
-            <a:pPr algn="ctr">
-              <a:defRPr sz="1000">
-                <a:solidFill>
-                  <a:srgbClr val="F8FAFC"/>
-                </a:solidFill>
-              </a:defRPr>
-            </a:pPr>
-            <a:br/>
-            <a:r>
-              <a:t>Tripwire Database Engine</a:t>
-            </a:r>
-          </a:p>
-          <a:p>
-            <a:pPr algn="ctr">
-              <a:defRPr sz="1000">
-                <a:solidFill>
-                  <a:srgbClr val="F8FAFC"/>
-                </a:solidFill>
-              </a:defRPr>
-            </a:pPr>
-            <a:br/>
-            <a:r>
-              <a:t>SQLAlchemy ORM + SQLite/PG</a:t>
-            </a:r>
-          </a:p>
-          <a:p>
-            <a:pPr algn="ctr">
-              <a:defRPr sz="1000">
-                <a:solidFill>
-                  <a:srgbClr val="F8FAFC"/>
-                </a:solidFill>
-              </a:defRPr>
-            </a:pPr>
-            <a:br/>
-            <a:r>
-              <a:t>• Indexed Student Telemetry</a:t>
-            </a:r>
-          </a:p>
-          <a:p>
-            <a:pPr algn="ctr">
-              <a:defRPr sz="1000">
-                <a:solidFill>
-                  <a:srgbClr val="F8FAFC"/>
-                </a:solidFill>
-              </a:defRPr>
-            </a:pPr>
-            <a:br/>
-            <a:r>
-              <a:t>• Attendance Register State</a:t>
-            </a:r>
-          </a:p>
-          <a:p>
-            <a:pPr algn="ctr">
-              <a:defRPr sz="1000">
-                <a:solidFill>
-                  <a:srgbClr val="F8FAFC"/>
-                </a:solidFill>
-              </a:defRPr>
-            </a:pPr>
-            <a:br/>
-            <a:r>
-              <a:t>• Leave Record Cache</a:t>
-            </a:r>
-          </a:p>
-          <a:p>
-            <a:pPr algn="ctr">
-              <a:defRPr sz="1000">
-                <a:solidFill>
-                  <a:srgbClr val="F8FAFC"/>
-                </a:solidFill>
-              </a:defRPr>
-            </a:pPr>
-            <a:br/>
-            <a:r>
-              <a:t>• Historical DVI Timeseries</a:t>
+            <a:r>
+              <a:t>Solves the first-year or transfer student 'blank slate' problem. For students with &lt; 3 weeks of historical data, Tripwire blends individual data with cohort medians using Bayesian priors: Effective_Baseline = w*Student_Base + (1-w)*Cohort_Median. Eliminates early-semester blindspots.</a:t>
             </a:r>
           </a:p>
         </p:txBody>
@@ -8915,8 +9633,8 @@
         </p:nvSpPr>
         <p:spPr>
           <a:xfrm>
-            <a:off x="6217920" y="1463040"/>
-            <a:ext cx="2560320" cy="4663440"/>
+            <a:off x="731520" y="3383280"/>
+            <a:ext cx="10728655" cy="896112"/>
           </a:xfrm>
           <a:prstGeom prst="roundRect">
             <a:avLst/>
@@ -8960,8 +9678,8 @@
         </p:nvSpPr>
         <p:spPr>
           <a:xfrm>
-            <a:off x="6355080" y="1645920"/>
-            <a:ext cx="2286000" cy="4297680"/>
+            <a:off x="1005840" y="3438144"/>
+            <a:ext cx="10149840" cy="777240"/>
           </a:xfrm>
           <a:prstGeom prst="rect">
             <a:avLst/>
@@ -8974,93 +9692,27 @@
           </a:bodyPr>
           <a:lstStyle/>
           <a:p>
-            <a:pPr algn="ctr">
-              <a:defRPr sz="1300" b="1">
+            <a:pPr>
+              <a:defRPr sz="1200" b="1">
                 <a:solidFill>
                   <a:srgbClr val="10B981"/>
                 </a:solidFill>
               </a:defRPr>
             </a:pPr>
             <a:r>
-              <a:t>PREDICTIVE DVI ENGINE</a:t>
-            </a:r>
-          </a:p>
-          <a:p>
-            <a:pPr algn="ctr">
-              <a:defRPr sz="1000">
+              <a:t>3. Approved Duty-Leave Mathematical Masking</a:t>
+            </a:r>
+          </a:p>
+          <a:p>
+            <a:pPr>
+              <a:defRPr sz="950">
                 <a:solidFill>
                   <a:srgbClr val="F8FAFC"/>
                 </a:solidFill>
               </a:defRPr>
             </a:pPr>
-            <a:br/>
-            <a:r>
-              <a:t>FastAPI Python Core</a:t>
-            </a:r>
-          </a:p>
-          <a:p>
-            <a:pPr algn="ctr">
-              <a:defRPr sz="1000">
-                <a:solidFill>
-                  <a:srgbClr val="F8FAFC"/>
-                </a:solidFill>
-              </a:defRPr>
-            </a:pPr>
-            <a:br/>
-            <a:r>
-              <a:t>NumPy Matrix Computation</a:t>
-            </a:r>
-          </a:p>
-          <a:p>
-            <a:pPr algn="ctr">
-              <a:defRPr sz="1000">
-                <a:solidFill>
-                  <a:srgbClr val="F8FAFC"/>
-                </a:solidFill>
-              </a:defRPr>
-            </a:pPr>
-            <a:br/>
-            <a:r>
-              <a:t>• EWMA Temporal Smoother</a:t>
-            </a:r>
-          </a:p>
-          <a:p>
-            <a:pPr algn="ctr">
-              <a:defRPr sz="1000">
-                <a:solidFill>
-                  <a:srgbClr val="F8FAFC"/>
-                </a:solidFill>
-              </a:defRPr>
-            </a:pPr>
-            <a:br/>
-            <a:r>
-              <a:t>• Bayesian Cold-Start Prior</a:t>
-            </a:r>
-          </a:p>
-          <a:p>
-            <a:pPr algn="ctr">
-              <a:defRPr sz="1000">
-                <a:solidFill>
-                  <a:srgbClr val="F8FAFC"/>
-                </a:solidFill>
-              </a:defRPr>
-            </a:pPr>
-            <a:br/>
-            <a:r>
-              <a:t>• Approved Leave Masker</a:t>
-            </a:r>
-          </a:p>
-          <a:p>
-            <a:pPr algn="ctr">
-              <a:defRPr sz="1000">
-                <a:solidFill>
-                  <a:srgbClr val="F8FAFC"/>
-                </a:solidFill>
-              </a:defRPr>
-            </a:pPr>
-            <a:br/>
-            <a:r>
-              <a:t>• Counterfactual Generator</a:t>
+            <a:r>
+              <a:t>Unlike standard ERPs that record duty leaves as unexcused absences until manual end-of-term audit, Tripwire ingests approved leaves directly. Verified medical/hackathon dates are mathematically excluded from drift penalties. Campus achievers are never penalized.</a:t>
             </a:r>
           </a:p>
         </p:txBody>
@@ -9073,8 +9725,8 @@
         </p:nvSpPr>
         <p:spPr>
           <a:xfrm>
-            <a:off x="9006840" y="1463040"/>
-            <a:ext cx="2468880" cy="4663440"/>
+            <a:off x="731520" y="4343400"/>
+            <a:ext cx="10728655" cy="896112"/>
           </a:xfrm>
           <a:prstGeom prst="roundRect">
             <a:avLst/>
@@ -9118,8 +9770,8 @@
         </p:nvSpPr>
         <p:spPr>
           <a:xfrm>
-            <a:off x="9144000" y="1645920"/>
-            <a:ext cx="2194560" cy="4297680"/>
+            <a:off x="1005840" y="4398264"/>
+            <a:ext cx="10149840" cy="777240"/>
           </a:xfrm>
           <a:prstGeom prst="rect">
             <a:avLst/>
@@ -9132,93 +9784,119 @@
           </a:bodyPr>
           <a:lstStyle/>
           <a:p>
-            <a:pPr algn="ctr">
-              <a:defRPr sz="1300" b="1">
+            <a:pPr>
+              <a:defRPr sz="1200" b="1">
                 <a:solidFill>
                   <a:srgbClr val="F59E0B"/>
                 </a:solidFill>
               </a:defRPr>
             </a:pPr>
             <a:r>
-              <a:t>FACULTY ADVISOR COCKPIT</a:t>
-            </a:r>
-          </a:p>
-          <a:p>
-            <a:pPr algn="ctr">
-              <a:defRPr sz="1000">
+              <a:t>4. Actionable Counterfactual Explainability (XAI)</a:t>
+            </a:r>
+          </a:p>
+          <a:p>
+            <a:pPr>
+              <a:defRPr sz="950">
                 <a:solidFill>
                   <a:srgbClr val="F8FAFC"/>
                 </a:solidFill>
               </a:defRPr>
             </a:pPr>
-            <a:br/>
-            <a:r>
-              <a:t>React 18 + Vite Web Client</a:t>
-            </a:r>
-          </a:p>
-          <a:p>
-            <a:pPr algn="ctr">
-              <a:defRPr sz="1000">
+            <a:r>
+              <a:t>Grounded in Wachter et al. (2017) counterfactual theory: x* = argmin d(x, x') s.t. f(x') &lt; threshold. Tripwire computes the minimal feasible behavioral changes required to clear the alert, giving faculty mentors hopeful, constructive guidance instead of punitive warnings.</a:t>
+            </a:r>
+          </a:p>
+        </p:txBody>
+      </p:sp>
+      <p:sp>
+        <p:nvSpPr>
+          <p:cNvPr id="13" name="Rounded Rectangle 12"/>
+          <p:cNvSpPr/>
+          <p:nvPr/>
+        </p:nvSpPr>
+        <p:spPr>
+          <a:xfrm>
+            <a:off x="731520" y="5303520"/>
+            <a:ext cx="10728655" cy="896112"/>
+          </a:xfrm>
+          <a:prstGeom prst="roundRect">
+            <a:avLst/>
+          </a:prstGeom>
+          <a:solidFill>
+            <a:srgbClr val="131A2B"/>
+          </a:solidFill>
+          <a:ln w="12700">
+            <a:solidFill>
+              <a:srgbClr val="F8FAFC"/>
+            </a:solidFill>
+          </a:ln>
+        </p:spPr>
+        <p:style>
+          <a:lnRef idx="1">
+            <a:schemeClr val="accent1"/>
+          </a:lnRef>
+          <a:fillRef idx="3">
+            <a:schemeClr val="accent1"/>
+          </a:fillRef>
+          <a:effectRef idx="2">
+            <a:schemeClr val="accent1"/>
+          </a:effectRef>
+          <a:fontRef idx="minor">
+            <a:schemeClr val="lt1"/>
+          </a:fontRef>
+        </p:style>
+        <p:txBody>
+          <a:bodyPr rtlCol="0" anchor="ctr"/>
+          <a:lstStyle/>
+          <a:p>
+            <a:pPr algn="ctr"/>
+          </a:p>
+        </p:txBody>
+      </p:sp>
+      <p:sp>
+        <p:nvSpPr>
+          <p:cNvPr id="14" name="TextBox 13"/>
+          <p:cNvSpPr txBox="1"/>
+          <p:nvPr/>
+        </p:nvSpPr>
+        <p:spPr>
+          <a:xfrm>
+            <a:off x="1005840" y="5358384"/>
+            <a:ext cx="10149840" cy="777240"/>
+          </a:xfrm>
+          <a:prstGeom prst="rect">
+            <a:avLst/>
+          </a:prstGeom>
+          <a:noFill/>
+        </p:spPr>
+        <p:txBody>
+          <a:bodyPr wrap="square">
+            <a:spAutoFit/>
+          </a:bodyPr>
+          <a:lstStyle/>
+          <a:p>
+            <a:pPr>
+              <a:defRPr sz="1200" b="1">
                 <a:solidFill>
                   <a:srgbClr val="F8FAFC"/>
                 </a:solidFill>
               </a:defRPr>
             </a:pPr>
-            <a:br/>
-            <a:r>
-              <a:t>Interactive Glassmorphism UI</a:t>
-            </a:r>
-          </a:p>
-          <a:p>
-            <a:pPr algn="ctr">
-              <a:defRPr sz="1000">
+            <a:r>
+              <a:t>5. Asymmetric Hysteresis Recovery Pipeline</a:t>
+            </a:r>
+          </a:p>
+          <a:p>
+            <a:pPr>
+              <a:defRPr sz="950">
                 <a:solidFill>
                   <a:srgbClr val="F8FAFC"/>
                 </a:solidFill>
               </a:defRPr>
             </a:pPr>
-            <a:br/>
-            <a:r>
-              <a:t>• Real-Time Risk Radar Feed</a:t>
-            </a:r>
-          </a:p>
-          <a:p>
-            <a:pPr algn="ctr">
-              <a:defRPr sz="1000">
-                <a:solidFill>
-                  <a:srgbClr val="F8FAFC"/>
-                </a:solidFill>
-              </a:defRPr>
-            </a:pPr>
-            <a:br/>
-            <a:r>
-              <a:t>• One-Click Batch Register</a:t>
-            </a:r>
-          </a:p>
-          <a:p>
-            <a:pPr algn="ctr">
-              <a:defRPr sz="1000">
-                <a:solidFill>
-                  <a:srgbClr val="F8FAFC"/>
-                </a:solidFill>
-              </a:defRPr>
-            </a:pPr>
-            <a:br/>
-            <a:r>
-              <a:t>• DVI Radial Gauges &amp; Alerts</a:t>
-            </a:r>
-          </a:p>
-          <a:p>
-            <a:pPr algn="ctr">
-              <a:defRPr sz="1000">
-                <a:solidFill>
-                  <a:srgbClr val="F8FAFC"/>
-                </a:solidFill>
-              </a:defRPr>
-            </a:pPr>
-            <a:br/>
-            <a:r>
-              <a:t>• Closed-Loop Intervention Log</a:t>
+            <a:r>
+              <a:t>Prevents alert 'flapping' (rapid oscillation between normal and alert). Once triggered, an alert clears only when the student sustains DVI &lt; 55 for 2 consecutive weeks, and reaches Normal standing at DVI &lt; 40.</a:t>
             </a:r>
           </a:p>
         </p:txBody>
@@ -9314,7 +9992,7 @@
               </a:defRPr>
             </a:pPr>
             <a:r>
-              <a:t>7. TECHNOLOGY STACK</a:t>
+              <a:t>6. SYSTEM / SOLUTION ARCHITECTURE</a:t>
             </a:r>
           </a:p>
         </p:txBody>
@@ -9349,7 +10027,7 @@
               </a:defRPr>
             </a:pPr>
             <a:r>
-              <a:t>High-Throughput ASGI Backend &amp; Modern Reactive Client</a:t>
+              <a:t>How Tripwire Integrates with College ERP Infrastructure</a:t>
             </a:r>
           </a:p>
           <a:p>
@@ -9361,7 +10039,7 @@
               </a:defRPr>
             </a:pPr>
             <a:r>
-              <a:t>Selected for sub-10ms calculation velocity, reliability, and zero deployment friction.</a:t>
+              <a:t>A lightweight, high-speed telemetry pipeline connecting institutional databases to mentor decision support.</a:t>
             </a:r>
           </a:p>
         </p:txBody>
@@ -9375,7 +10053,178 @@
         <p:spPr>
           <a:xfrm>
             <a:off x="731520" y="1463040"/>
-            <a:ext cx="5257800" cy="2194560"/>
+            <a:ext cx="2468880" cy="4663440"/>
+          </a:xfrm>
+          <a:prstGeom prst="roundRect">
+            <a:avLst/>
+          </a:prstGeom>
+          <a:solidFill>
+            <a:srgbClr val="131A2B"/>
+          </a:solidFill>
+          <a:ln w="12700">
+            <a:solidFill>
+              <a:srgbClr val="0EA5E9"/>
+            </a:solidFill>
+          </a:ln>
+        </p:spPr>
+        <p:style>
+          <a:lnRef idx="1">
+            <a:schemeClr val="accent1"/>
+          </a:lnRef>
+          <a:fillRef idx="3">
+            <a:schemeClr val="accent1"/>
+          </a:fillRef>
+          <a:effectRef idx="2">
+            <a:schemeClr val="accent1"/>
+          </a:effectRef>
+          <a:fontRef idx="minor">
+            <a:schemeClr val="lt1"/>
+          </a:fontRef>
+        </p:style>
+        <p:txBody>
+          <a:bodyPr rtlCol="0" anchor="ctr"/>
+          <a:lstStyle/>
+          <a:p>
+            <a:pPr algn="ctr"/>
+          </a:p>
+        </p:txBody>
+      </p:sp>
+      <p:sp>
+        <p:nvSpPr>
+          <p:cNvPr id="6" name="TextBox 5"/>
+          <p:cNvSpPr txBox="1"/>
+          <p:nvPr/>
+        </p:nvSpPr>
+        <p:spPr>
+          <a:xfrm>
+            <a:off x="868680" y="1645920"/>
+            <a:ext cx="2194560" cy="4297680"/>
+          </a:xfrm>
+          <a:prstGeom prst="rect">
+            <a:avLst/>
+          </a:prstGeom>
+          <a:noFill/>
+        </p:spPr>
+        <p:txBody>
+          <a:bodyPr wrap="square">
+            <a:spAutoFit/>
+          </a:bodyPr>
+          <a:lstStyle/>
+          <a:p>
+            <a:pPr algn="ctr">
+              <a:defRPr sz="1300" b="1">
+                <a:solidFill>
+                  <a:srgbClr val="0EA5E9"/>
+                </a:solidFill>
+              </a:defRPr>
+            </a:pPr>
+            <a:r>
+              <a:t>COLLEGE ERP DATA LAYER</a:t>
+            </a:r>
+          </a:p>
+          <a:p>
+            <a:pPr algn="ctr">
+              <a:defRPr sz="1000">
+                <a:solidFill>
+                  <a:srgbClr val="F8FAFC"/>
+                </a:solidFill>
+              </a:defRPr>
+            </a:pPr>
+            <a:br/>
+            <a:r>
+              <a:t>Standard College ERP</a:t>
+            </a:r>
+          </a:p>
+          <a:p>
+            <a:pPr algn="ctr">
+              <a:defRPr sz="1000">
+                <a:solidFill>
+                  <a:srgbClr val="F8FAFC"/>
+                </a:solidFill>
+              </a:defRPr>
+            </a:pPr>
+            <a:br/>
+            <a:r>
+              <a:t>(ETLAB / Linways / SIS)</a:t>
+            </a:r>
+          </a:p>
+          <a:p>
+            <a:pPr algn="ctr">
+              <a:defRPr sz="1000">
+                <a:solidFill>
+                  <a:srgbClr val="F8FAFC"/>
+                </a:solidFill>
+              </a:defRPr>
+            </a:pPr>
+            <a:br/>
+            <a:r>
+              <a:t>• Daily Period Attendance (1–6)</a:t>
+            </a:r>
+          </a:p>
+          <a:p>
+            <a:pPr algn="ctr">
+              <a:defRPr sz="1000">
+                <a:solidFill>
+                  <a:srgbClr val="F8FAFC"/>
+                </a:solidFill>
+              </a:defRPr>
+            </a:pPr>
+            <a:br/>
+            <a:r>
+              <a:t>• Series Exam Marks (CIE)</a:t>
+            </a:r>
+          </a:p>
+          <a:p>
+            <a:pPr algn="ctr">
+              <a:defRPr sz="1000">
+                <a:solidFill>
+                  <a:srgbClr val="F8FAFC"/>
+                </a:solidFill>
+              </a:defRPr>
+            </a:pPr>
+            <a:br/>
+            <a:r>
+              <a:t>• Assignment Submission Logs</a:t>
+            </a:r>
+          </a:p>
+          <a:p>
+            <a:pPr algn="ctr">
+              <a:defRPr sz="1000">
+                <a:solidFill>
+                  <a:srgbClr val="F8FAFC"/>
+                </a:solidFill>
+              </a:defRPr>
+            </a:pPr>
+            <a:br/>
+            <a:r>
+              <a:t>• LMS Activity Counters</a:t>
+            </a:r>
+          </a:p>
+          <a:p>
+            <a:pPr algn="ctr">
+              <a:defRPr sz="1000">
+                <a:solidFill>
+                  <a:srgbClr val="F8FAFC"/>
+                </a:solidFill>
+              </a:defRPr>
+            </a:pPr>
+            <a:br/>
+            <a:r>
+              <a:t>• Approved Medical Leaves</a:t>
+            </a:r>
+          </a:p>
+        </p:txBody>
+      </p:sp>
+      <p:sp>
+        <p:nvSpPr>
+          <p:cNvPr id="7" name="Rounded Rectangle 6"/>
+          <p:cNvSpPr/>
+          <p:nvPr/>
+        </p:nvSpPr>
+        <p:spPr>
+          <a:xfrm>
+            <a:off x="3429000" y="1463040"/>
+            <a:ext cx="2560320" cy="4663440"/>
           </a:xfrm>
           <a:prstGeom prst="roundRect">
             <a:avLst/>
@@ -9413,14 +10262,14 @@
       </p:sp>
       <p:sp>
         <p:nvSpPr>
-          <p:cNvPr id="6" name="TextBox 5"/>
+          <p:cNvPr id="8" name="TextBox 7"/>
           <p:cNvSpPr txBox="1"/>
           <p:nvPr/>
         </p:nvSpPr>
         <p:spPr>
           <a:xfrm>
-            <a:off x="960120" y="1600200"/>
-            <a:ext cx="4800600" cy="1920240"/>
+            <a:off x="3566160" y="1645920"/>
+            <a:ext cx="2286000" cy="4297680"/>
           </a:xfrm>
           <a:prstGeom prst="rect">
             <a:avLst/>
@@ -9433,145 +10282,93 @@
           </a:bodyPr>
           <a:lstStyle/>
           <a:p>
-            <a:pPr>
-              <a:defRPr sz="1000" b="1">
+            <a:pPr algn="ctr">
+              <a:defRPr sz="1300" b="1">
                 <a:solidFill>
                   <a:srgbClr val="6366F1"/>
                 </a:solidFill>
               </a:defRPr>
             </a:pPr>
             <a:r>
-              <a:t>BACKEND API FRAMEWORK</a:t>
-            </a:r>
-          </a:p>
-          <a:p>
-            <a:pPr>
-              <a:defRPr sz="1400" b="1">
+              <a:t>INGESTION &amp; PERSISTENCE</a:t>
+            </a:r>
+          </a:p>
+          <a:p>
+            <a:pPr algn="ctr">
+              <a:defRPr sz="1000">
                 <a:solidFill>
                   <a:srgbClr val="F8FAFC"/>
                 </a:solidFill>
               </a:defRPr>
             </a:pPr>
-            <a:r>
-              <a:t>FastAPI (Python 3.11)</a:t>
-            </a:r>
-          </a:p>
-          <a:p>
             <a:br/>
-            <a:pPr>
+            <a:r>
+              <a:t>Tripwire Database Engine</a:t>
+            </a:r>
+          </a:p>
+          <a:p>
+            <a:pPr algn="ctr">
               <a:defRPr sz="1000">
                 <a:solidFill>
-                  <a:srgbClr val="94A3B8"/>
-                </a:solidFill>
-              </a:defRPr>
-            </a:pPr>
-            <a:r>
-              <a:t>Asynchronous ASGI concurrency, automatic OpenAPI documentation, strict Pydantic v2 schema validation, OAuth2 JWT stateless authentication, sub-10ms endpoint latency.</a:t>
-            </a:r>
-          </a:p>
-        </p:txBody>
-      </p:sp>
-      <p:sp>
-        <p:nvSpPr>
-          <p:cNvPr id="7" name="Rounded Rectangle 6"/>
-          <p:cNvSpPr/>
-          <p:nvPr/>
-        </p:nvSpPr>
-        <p:spPr>
-          <a:xfrm>
-            <a:off x="6172200" y="1463040"/>
-            <a:ext cx="5257800" cy="2194560"/>
-          </a:xfrm>
-          <a:prstGeom prst="roundRect">
-            <a:avLst/>
-          </a:prstGeom>
-          <a:solidFill>
-            <a:srgbClr val="131A2B"/>
-          </a:solidFill>
-          <a:ln w="12700">
-            <a:solidFill>
-              <a:srgbClr val="0EA5E9"/>
-            </a:solidFill>
-          </a:ln>
-        </p:spPr>
-        <p:style>
-          <a:lnRef idx="1">
-            <a:schemeClr val="accent1"/>
-          </a:lnRef>
-          <a:fillRef idx="3">
-            <a:schemeClr val="accent1"/>
-          </a:fillRef>
-          <a:effectRef idx="2">
-            <a:schemeClr val="accent1"/>
-          </a:effectRef>
-          <a:fontRef idx="minor">
-            <a:schemeClr val="lt1"/>
-          </a:fontRef>
-        </p:style>
-        <p:txBody>
-          <a:bodyPr rtlCol="0" anchor="ctr"/>
-          <a:lstStyle/>
-          <a:p>
-            <a:pPr algn="ctr"/>
-          </a:p>
-        </p:txBody>
-      </p:sp>
-      <p:sp>
-        <p:nvSpPr>
-          <p:cNvPr id="8" name="TextBox 7"/>
-          <p:cNvSpPr txBox="1"/>
-          <p:nvPr/>
-        </p:nvSpPr>
-        <p:spPr>
-          <a:xfrm>
-            <a:off x="6400800" y="1600200"/>
-            <a:ext cx="4800600" cy="1920240"/>
-          </a:xfrm>
-          <a:prstGeom prst="rect">
-            <a:avLst/>
-          </a:prstGeom>
-          <a:noFill/>
-        </p:spPr>
-        <p:txBody>
-          <a:bodyPr wrap="square">
-            <a:spAutoFit/>
-          </a:bodyPr>
-          <a:lstStyle/>
-          <a:p>
-            <a:pPr>
-              <a:defRPr sz="1000" b="1">
-                <a:solidFill>
-                  <a:srgbClr val="0EA5E9"/>
-                </a:solidFill>
-              </a:defRPr>
-            </a:pPr>
-            <a:r>
-              <a:t>MATHEMATICAL ENGINE</a:t>
-            </a:r>
-          </a:p>
-          <a:p>
-            <a:pPr>
-              <a:defRPr sz="1400" b="1">
-                <a:solidFill>
                   <a:srgbClr val="F8FAFC"/>
                 </a:solidFill>
               </a:defRPr>
             </a:pPr>
-            <a:r>
-              <a:t>NumPy &amp; Custom Analytical Core</a:t>
-            </a:r>
-          </a:p>
-          <a:p>
             <a:br/>
-            <a:pPr>
+            <a:r>
+              <a:t>SQLAlchemy ORM + SQLite/PG</a:t>
+            </a:r>
+          </a:p>
+          <a:p>
+            <a:pPr algn="ctr">
               <a:defRPr sz="1000">
                 <a:solidFill>
-                  <a:srgbClr val="94A3B8"/>
-                </a:solidFill>
-              </a:defRPr>
-            </a:pPr>
-            <a:r>
-              <a:t>Vectorized array processing for EWMA smoothing, Bayesian prior calculations, and counterfactual simulation. Computes full cohort DVI scores across 50 students in &lt; 200ms.</a:t>
+                  <a:srgbClr val="F8FAFC"/>
+                </a:solidFill>
+              </a:defRPr>
+            </a:pPr>
+            <a:br/>
+            <a:r>
+              <a:t>• Indexed Student Telemetry</a:t>
+            </a:r>
+          </a:p>
+          <a:p>
+            <a:pPr algn="ctr">
+              <a:defRPr sz="1000">
+                <a:solidFill>
+                  <a:srgbClr val="F8FAFC"/>
+                </a:solidFill>
+              </a:defRPr>
+            </a:pPr>
+            <a:br/>
+            <a:r>
+              <a:t>• Attendance Register State</a:t>
+            </a:r>
+          </a:p>
+          <a:p>
+            <a:pPr algn="ctr">
+              <a:defRPr sz="1000">
+                <a:solidFill>
+                  <a:srgbClr val="F8FAFC"/>
+                </a:solidFill>
+              </a:defRPr>
+            </a:pPr>
+            <a:br/>
+            <a:r>
+              <a:t>• Leave Record Cache</a:t>
+            </a:r>
+          </a:p>
+          <a:p>
+            <a:pPr algn="ctr">
+              <a:defRPr sz="1000">
+                <a:solidFill>
+                  <a:srgbClr val="F8FAFC"/>
+                </a:solidFill>
+              </a:defRPr>
+            </a:pPr>
+            <a:br/>
+            <a:r>
+              <a:t>• Historical DVI Timeseries</a:t>
             </a:r>
           </a:p>
         </p:txBody>
@@ -9584,8 +10381,8 @@
         </p:nvSpPr>
         <p:spPr>
           <a:xfrm>
-            <a:off x="731520" y="3840480"/>
-            <a:ext cx="5257800" cy="2194560"/>
+            <a:off x="6217920" y="1463040"/>
+            <a:ext cx="2560320" cy="4663440"/>
           </a:xfrm>
           <a:prstGeom prst="roundRect">
             <a:avLst/>
@@ -9629,8 +10426,8 @@
         </p:nvSpPr>
         <p:spPr>
           <a:xfrm>
-            <a:off x="960120" y="3977640"/>
-            <a:ext cx="4800600" cy="1920240"/>
+            <a:off x="6355080" y="1645920"/>
+            <a:ext cx="2286000" cy="4297680"/>
           </a:xfrm>
           <a:prstGeom prst="rect">
             <a:avLst/>
@@ -9643,40 +10440,93 @@
           </a:bodyPr>
           <a:lstStyle/>
           <a:p>
-            <a:pPr>
-              <a:defRPr sz="1000" b="1">
+            <a:pPr algn="ctr">
+              <a:defRPr sz="1300" b="1">
                 <a:solidFill>
                   <a:srgbClr val="10B981"/>
                 </a:solidFill>
               </a:defRPr>
             </a:pPr>
             <a:r>
-              <a:t>PERSISTENCE &amp; ORM</a:t>
-            </a:r>
-          </a:p>
-          <a:p>
-            <a:pPr>
-              <a:defRPr sz="1400" b="1">
+              <a:t>PREDICTIVE DVI ENGINE</a:t>
+            </a:r>
+          </a:p>
+          <a:p>
+            <a:pPr algn="ctr">
+              <a:defRPr sz="1000">
                 <a:solidFill>
                   <a:srgbClr val="F8FAFC"/>
                 </a:solidFill>
               </a:defRPr>
             </a:pPr>
-            <a:r>
-              <a:t>SQLAlchemy 2.0 &amp; SQLite / PostgreSQL</a:t>
-            </a:r>
-          </a:p>
-          <a:p>
             <a:br/>
-            <a:pPr>
+            <a:r>
+              <a:t>FastAPI Python Core</a:t>
+            </a:r>
+          </a:p>
+          <a:p>
+            <a:pPr algn="ctr">
               <a:defRPr sz="1000">
                 <a:solidFill>
-                  <a:srgbClr val="94A3B8"/>
-                </a:solidFill>
-              </a:defRPr>
-            </a:pPr>
-            <a:r>
-              <a:t>Relational ACID compliance, optimized indexed queries for multi-period student attendance records, clean migration path to enterprise PostgreSQL clusters.</a:t>
+                  <a:srgbClr val="F8FAFC"/>
+                </a:solidFill>
+              </a:defRPr>
+            </a:pPr>
+            <a:br/>
+            <a:r>
+              <a:t>NumPy Matrix Computation</a:t>
+            </a:r>
+          </a:p>
+          <a:p>
+            <a:pPr algn="ctr">
+              <a:defRPr sz="1000">
+                <a:solidFill>
+                  <a:srgbClr val="F8FAFC"/>
+                </a:solidFill>
+              </a:defRPr>
+            </a:pPr>
+            <a:br/>
+            <a:r>
+              <a:t>• EWMA Temporal Smoother</a:t>
+            </a:r>
+          </a:p>
+          <a:p>
+            <a:pPr algn="ctr">
+              <a:defRPr sz="1000">
+                <a:solidFill>
+                  <a:srgbClr val="F8FAFC"/>
+                </a:solidFill>
+              </a:defRPr>
+            </a:pPr>
+            <a:br/>
+            <a:r>
+              <a:t>• Bayesian Cold-Start Prior</a:t>
+            </a:r>
+          </a:p>
+          <a:p>
+            <a:pPr algn="ctr">
+              <a:defRPr sz="1000">
+                <a:solidFill>
+                  <a:srgbClr val="F8FAFC"/>
+                </a:solidFill>
+              </a:defRPr>
+            </a:pPr>
+            <a:br/>
+            <a:r>
+              <a:t>• Approved Leave Masker</a:t>
+            </a:r>
+          </a:p>
+          <a:p>
+            <a:pPr algn="ctr">
+              <a:defRPr sz="1000">
+                <a:solidFill>
+                  <a:srgbClr val="F8FAFC"/>
+                </a:solidFill>
+              </a:defRPr>
+            </a:pPr>
+            <a:br/>
+            <a:r>
+              <a:t>• Counterfactual Generator</a:t>
             </a:r>
           </a:p>
         </p:txBody>
@@ -9689,8 +10539,8 @@
         </p:nvSpPr>
         <p:spPr>
           <a:xfrm>
-            <a:off x="6172200" y="3840480"/>
-            <a:ext cx="5257800" cy="2194560"/>
+            <a:off x="9006840" y="1463040"/>
+            <a:ext cx="2468880" cy="4663440"/>
           </a:xfrm>
           <a:prstGeom prst="roundRect">
             <a:avLst/>
@@ -9734,8 +10584,8 @@
         </p:nvSpPr>
         <p:spPr>
           <a:xfrm>
-            <a:off x="6400800" y="3977640"/>
-            <a:ext cx="4800600" cy="1920240"/>
+            <a:off x="9144000" y="1645920"/>
+            <a:ext cx="2194560" cy="4297680"/>
           </a:xfrm>
           <a:prstGeom prst="rect">
             <a:avLst/>
@@ -9748,40 +10598,93 @@
           </a:bodyPr>
           <a:lstStyle/>
           <a:p>
-            <a:pPr>
-              <a:defRPr sz="1000" b="1">
+            <a:pPr algn="ctr">
+              <a:defRPr sz="1300" b="1">
                 <a:solidFill>
                   <a:srgbClr val="F59E0B"/>
                 </a:solidFill>
               </a:defRPr>
             </a:pPr>
             <a:r>
-              <a:t>FRONTEND INTERFACE</a:t>
-            </a:r>
-          </a:p>
-          <a:p>
-            <a:pPr>
-              <a:defRPr sz="1400" b="1">
+              <a:t>FACULTY ADVISOR COCKPIT</a:t>
+            </a:r>
+          </a:p>
+          <a:p>
+            <a:pPr algn="ctr">
+              <a:defRPr sz="1000">
                 <a:solidFill>
                   <a:srgbClr val="F8FAFC"/>
                 </a:solidFill>
               </a:defRPr>
             </a:pPr>
-            <a:r>
-              <a:t>React 18, Vite &amp; Recharts</a:t>
-            </a:r>
-          </a:p>
-          <a:p>
             <a:br/>
-            <a:pPr>
+            <a:r>
+              <a:t>React 18 + Vite Web Client</a:t>
+            </a:r>
+          </a:p>
+          <a:p>
+            <a:pPr algn="ctr">
               <a:defRPr sz="1000">
                 <a:solidFill>
-                  <a:srgbClr val="94A3B8"/>
-                </a:solidFill>
-              </a:defRPr>
-            </a:pPr>
-            <a:r>
-              <a:t>Sub-second Hot Module Replacement (HMR), SVG radial gauge rendering, Lucide Icons, responsive layout, Axios interceptors with automatic JWT auth management.</a:t>
+                  <a:srgbClr val="F8FAFC"/>
+                </a:solidFill>
+              </a:defRPr>
+            </a:pPr>
+            <a:br/>
+            <a:r>
+              <a:t>Interactive Glassmorphism UI</a:t>
+            </a:r>
+          </a:p>
+          <a:p>
+            <a:pPr algn="ctr">
+              <a:defRPr sz="1000">
+                <a:solidFill>
+                  <a:srgbClr val="F8FAFC"/>
+                </a:solidFill>
+              </a:defRPr>
+            </a:pPr>
+            <a:br/>
+            <a:r>
+              <a:t>• Real-Time Risk Radar Feed</a:t>
+            </a:r>
+          </a:p>
+          <a:p>
+            <a:pPr algn="ctr">
+              <a:defRPr sz="1000">
+                <a:solidFill>
+                  <a:srgbClr val="F8FAFC"/>
+                </a:solidFill>
+              </a:defRPr>
+            </a:pPr>
+            <a:br/>
+            <a:r>
+              <a:t>• One-Click Batch Register</a:t>
+            </a:r>
+          </a:p>
+          <a:p>
+            <a:pPr algn="ctr">
+              <a:defRPr sz="1000">
+                <a:solidFill>
+                  <a:srgbClr val="F8FAFC"/>
+                </a:solidFill>
+              </a:defRPr>
+            </a:pPr>
+            <a:br/>
+            <a:r>
+              <a:t>• DVI Radial Gauges &amp; Alerts</a:t>
+            </a:r>
+          </a:p>
+          <a:p>
+            <a:pPr algn="ctr">
+              <a:defRPr sz="1000">
+                <a:solidFill>
+                  <a:srgbClr val="F8FAFC"/>
+                </a:solidFill>
+              </a:defRPr>
+            </a:pPr>
+            <a:br/>
+            <a:r>
+              <a:t>• Closed-Loop Intervention Log</a:t>
             </a:r>
           </a:p>
         </p:txBody>
@@ -9877,7 +10780,7 @@
               </a:defRPr>
             </a:pPr>
             <a:r>
-              <a:t>8. WORKING PROTOTYPE: FACULTY RISK RADAR &amp; COHORT HEATMAP</a:t>
+              <a:t>7. TECHNOLOGY STACK</a:t>
             </a:r>
           </a:p>
         </p:txBody>
@@ -9912,7 +10815,7 @@
               </a:defRPr>
             </a:pPr>
             <a:r>
-              <a:t>Interface 1: Live Dashboard Visualizing Student Behavioral Distribution</a:t>
+              <a:t>High-Throughput ASGI Backend &amp; Modern Reactive Client</a:t>
             </a:r>
           </a:p>
           <a:p>
@@ -9924,45 +10827,21 @@
               </a:defRPr>
             </a:pPr>
             <a:r>
-              <a:t>Live screenshot from the running Tripwire web application.</a:t>
-            </a:r>
-          </a:p>
-        </p:txBody>
-      </p:sp>
-      <p:pic>
-        <p:nvPicPr>
-          <p:cNvPr id="5" name="Picture 4" descr="02_dashboard.png"/>
-          <p:cNvPicPr>
-            <a:picLocks noChangeAspect="1"/>
-          </p:cNvPicPr>
-          <p:nvPr/>
-        </p:nvPicPr>
-        <p:blipFill>
-          <a:blip r:embed="rId2"/>
-          <a:stretch>
-            <a:fillRect/>
-          </a:stretch>
-        </p:blipFill>
+              <a:t>Selected for sub-10ms calculation velocity, reliability, and zero deployment friction.</a:t>
+            </a:r>
+          </a:p>
+        </p:txBody>
+      </p:sp>
+      <p:sp>
+        <p:nvSpPr>
+          <p:cNvPr id="5" name="Rounded Rectangle 4"/>
+          <p:cNvSpPr/>
+          <p:nvPr/>
+        </p:nvSpPr>
         <p:spPr>
           <a:xfrm>
             <a:off x="731520" y="1463040"/>
-            <a:ext cx="6858000" cy="4389120"/>
-          </a:xfrm>
-          <a:prstGeom prst="rect">
-            <a:avLst/>
-          </a:prstGeom>
-        </p:spPr>
-      </p:pic>
-      <p:sp>
-        <p:nvSpPr>
-          <p:cNvPr id="6" name="Rounded Rectangle 5"/>
-          <p:cNvSpPr/>
-          <p:nvPr/>
-        </p:nvSpPr>
-        <p:spPr>
-          <a:xfrm>
-            <a:off x="7772400" y="1463040"/>
-            <a:ext cx="3657600" cy="4389120"/>
+            <a:ext cx="5257800" cy="2194560"/>
           </a:xfrm>
           <a:prstGeom prst="roundRect">
             <a:avLst/>
@@ -10000,14 +10879,14 @@
       </p:sp>
       <p:sp>
         <p:nvSpPr>
-          <p:cNvPr id="7" name="TextBox 6"/>
+          <p:cNvPr id="6" name="TextBox 5"/>
           <p:cNvSpPr txBox="1"/>
           <p:nvPr/>
         </p:nvSpPr>
         <p:spPr>
           <a:xfrm>
-            <a:off x="8001000" y="1645920"/>
-            <a:ext cx="3200400" cy="4023360"/>
+            <a:off x="960120" y="1600200"/>
+            <a:ext cx="4800600" cy="1920240"/>
           </a:xfrm>
           <a:prstGeom prst="rect">
             <a:avLst/>
@@ -10021,14 +10900,26 @@
           <a:lstStyle/>
           <a:p>
             <a:pPr>
-              <a:defRPr sz="1300" b="1">
+              <a:defRPr sz="1000" b="1">
                 <a:solidFill>
                   <a:srgbClr val="6366F1"/>
                 </a:solidFill>
               </a:defRPr>
             </a:pPr>
             <a:r>
-              <a:t>INTERFACE: Risk Radar Dashboard</a:t>
+              <a:t>BACKEND API FRAMEWORK</a:t>
+            </a:r>
+          </a:p>
+          <a:p>
+            <a:pPr>
+              <a:defRPr sz="1400" b="1">
+                <a:solidFill>
+                  <a:srgbClr val="F8FAFC"/>
+                </a:solidFill>
+              </a:defRPr>
+            </a:pPr>
+            <a:r>
+              <a:t>FastAPI (Python 3.11)</a:t>
             </a:r>
           </a:p>
           <a:p>
@@ -10036,12 +10927,104 @@
             <a:pPr>
               <a:defRPr sz="1000">
                 <a:solidFill>
+                  <a:srgbClr val="94A3B8"/>
+                </a:solidFill>
+              </a:defRPr>
+            </a:pPr>
+            <a:r>
+              <a:t>Asynchronous ASGI concurrency, automatic OpenAPI documentation, strict Pydantic v2 schema validation, OAuth2 JWT stateless authentication, sub-10ms endpoint latency.</a:t>
+            </a:r>
+          </a:p>
+        </p:txBody>
+      </p:sp>
+      <p:sp>
+        <p:nvSpPr>
+          <p:cNvPr id="7" name="Rounded Rectangle 6"/>
+          <p:cNvSpPr/>
+          <p:nvPr/>
+        </p:nvSpPr>
+        <p:spPr>
+          <a:xfrm>
+            <a:off x="6172200" y="1463040"/>
+            <a:ext cx="5257800" cy="2194560"/>
+          </a:xfrm>
+          <a:prstGeom prst="roundRect">
+            <a:avLst/>
+          </a:prstGeom>
+          <a:solidFill>
+            <a:srgbClr val="131A2B"/>
+          </a:solidFill>
+          <a:ln w="12700">
+            <a:solidFill>
+              <a:srgbClr val="0EA5E9"/>
+            </a:solidFill>
+          </a:ln>
+        </p:spPr>
+        <p:style>
+          <a:lnRef idx="1">
+            <a:schemeClr val="accent1"/>
+          </a:lnRef>
+          <a:fillRef idx="3">
+            <a:schemeClr val="accent1"/>
+          </a:fillRef>
+          <a:effectRef idx="2">
+            <a:schemeClr val="accent1"/>
+          </a:effectRef>
+          <a:fontRef idx="minor">
+            <a:schemeClr val="lt1"/>
+          </a:fontRef>
+        </p:style>
+        <p:txBody>
+          <a:bodyPr rtlCol="0" anchor="ctr"/>
+          <a:lstStyle/>
+          <a:p>
+            <a:pPr algn="ctr"/>
+          </a:p>
+        </p:txBody>
+      </p:sp>
+      <p:sp>
+        <p:nvSpPr>
+          <p:cNvPr id="8" name="TextBox 7"/>
+          <p:cNvSpPr txBox="1"/>
+          <p:nvPr/>
+        </p:nvSpPr>
+        <p:spPr>
+          <a:xfrm>
+            <a:off x="6400800" y="1600200"/>
+            <a:ext cx="4800600" cy="1920240"/>
+          </a:xfrm>
+          <a:prstGeom prst="rect">
+            <a:avLst/>
+          </a:prstGeom>
+          <a:noFill/>
+        </p:spPr>
+        <p:txBody>
+          <a:bodyPr wrap="square">
+            <a:spAutoFit/>
+          </a:bodyPr>
+          <a:lstStyle/>
+          <a:p>
+            <a:pPr>
+              <a:defRPr sz="1000" b="1">
+                <a:solidFill>
+                  <a:srgbClr val="0EA5E9"/>
+                </a:solidFill>
+              </a:defRPr>
+            </a:pPr>
+            <a:r>
+              <a:t>MATHEMATICAL ENGINE</a:t>
+            </a:r>
+          </a:p>
+          <a:p>
+            <a:pPr>
+              <a:defRPr sz="1400" b="1">
+                <a:solidFill>
                   <a:srgbClr val="F8FAFC"/>
                 </a:solidFill>
               </a:defRPr>
             </a:pPr>
             <a:r>
-              <a:t>✔ Cohort Heatmap: Visualizes 50 students categorized into 7 behavioral archetypes (Normal, Slow Decline, Rapid Decline, Monitoring, Recovery, etc.).</a:t>
+              <a:t>NumPy &amp; Custom Analytical Core</a:t>
             </a:r>
           </a:p>
           <a:p>
@@ -10049,12 +11032,104 @@
             <a:pPr>
               <a:defRPr sz="1000">
                 <a:solidFill>
+                  <a:srgbClr val="94A3B8"/>
+                </a:solidFill>
+              </a:defRPr>
+            </a:pPr>
+            <a:r>
+              <a:t>Vectorized array processing for EWMA smoothing, Bayesian prior calculations, and counterfactual simulation. Computes full cohort DVI scores across 50 students in &lt; 200ms.</a:t>
+            </a:r>
+          </a:p>
+        </p:txBody>
+      </p:sp>
+      <p:sp>
+        <p:nvSpPr>
+          <p:cNvPr id="9" name="Rounded Rectangle 8"/>
+          <p:cNvSpPr/>
+          <p:nvPr/>
+        </p:nvSpPr>
+        <p:spPr>
+          <a:xfrm>
+            <a:off x="731520" y="3840480"/>
+            <a:ext cx="5257800" cy="2194560"/>
+          </a:xfrm>
+          <a:prstGeom prst="roundRect">
+            <a:avLst/>
+          </a:prstGeom>
+          <a:solidFill>
+            <a:srgbClr val="131A2B"/>
+          </a:solidFill>
+          <a:ln w="12700">
+            <a:solidFill>
+              <a:srgbClr val="10B981"/>
+            </a:solidFill>
+          </a:ln>
+        </p:spPr>
+        <p:style>
+          <a:lnRef idx="1">
+            <a:schemeClr val="accent1"/>
+          </a:lnRef>
+          <a:fillRef idx="3">
+            <a:schemeClr val="accent1"/>
+          </a:fillRef>
+          <a:effectRef idx="2">
+            <a:schemeClr val="accent1"/>
+          </a:effectRef>
+          <a:fontRef idx="minor">
+            <a:schemeClr val="lt1"/>
+          </a:fontRef>
+        </p:style>
+        <p:txBody>
+          <a:bodyPr rtlCol="0" anchor="ctr"/>
+          <a:lstStyle/>
+          <a:p>
+            <a:pPr algn="ctr"/>
+          </a:p>
+        </p:txBody>
+      </p:sp>
+      <p:sp>
+        <p:nvSpPr>
+          <p:cNvPr id="10" name="TextBox 9"/>
+          <p:cNvSpPr txBox="1"/>
+          <p:nvPr/>
+        </p:nvSpPr>
+        <p:spPr>
+          <a:xfrm>
+            <a:off x="960120" y="3977640"/>
+            <a:ext cx="4800600" cy="1920240"/>
+          </a:xfrm>
+          <a:prstGeom prst="rect">
+            <a:avLst/>
+          </a:prstGeom>
+          <a:noFill/>
+        </p:spPr>
+        <p:txBody>
+          <a:bodyPr wrap="square">
+            <a:spAutoFit/>
+          </a:bodyPr>
+          <a:lstStyle/>
+          <a:p>
+            <a:pPr>
+              <a:defRPr sz="1000" b="1">
+                <a:solidFill>
+                  <a:srgbClr val="10B981"/>
+                </a:solidFill>
+              </a:defRPr>
+            </a:pPr>
+            <a:r>
+              <a:t>PERSISTENCE &amp; ORM</a:t>
+            </a:r>
+          </a:p>
+          <a:p>
+            <a:pPr>
+              <a:defRPr sz="1400" b="1">
+                <a:solidFill>
                   <a:srgbClr val="F8FAFC"/>
                 </a:solidFill>
               </a:defRPr>
             </a:pPr>
             <a:r>
-              <a:t>✔ Triaged Alert Queue: Surfaces active alerts prioritized by drift velocity rather than static grades.</a:t>
+              <a:t>SQLAlchemy 2.0 &amp; SQLite / PostgreSQL</a:t>
             </a:r>
           </a:p>
           <a:p>
@@ -10062,12 +11137,104 @@
             <a:pPr>
               <a:defRPr sz="1000">
                 <a:solidFill>
+                  <a:srgbClr val="94A3B8"/>
+                </a:solidFill>
+              </a:defRPr>
+            </a:pPr>
+            <a:r>
+              <a:t>Relational ACID compliance, optimized indexed queries for multi-period student attendance records, clean migration path to enterprise PostgreSQL clusters.</a:t>
+            </a:r>
+          </a:p>
+        </p:txBody>
+      </p:sp>
+      <p:sp>
+        <p:nvSpPr>
+          <p:cNvPr id="11" name="Rounded Rectangle 10"/>
+          <p:cNvSpPr/>
+          <p:nvPr/>
+        </p:nvSpPr>
+        <p:spPr>
+          <a:xfrm>
+            <a:off x="6172200" y="3840480"/>
+            <a:ext cx="5257800" cy="2194560"/>
+          </a:xfrm>
+          <a:prstGeom prst="roundRect">
+            <a:avLst/>
+          </a:prstGeom>
+          <a:solidFill>
+            <a:srgbClr val="131A2B"/>
+          </a:solidFill>
+          <a:ln w="12700">
+            <a:solidFill>
+              <a:srgbClr val="F59E0B"/>
+            </a:solidFill>
+          </a:ln>
+        </p:spPr>
+        <p:style>
+          <a:lnRef idx="1">
+            <a:schemeClr val="accent1"/>
+          </a:lnRef>
+          <a:fillRef idx="3">
+            <a:schemeClr val="accent1"/>
+          </a:fillRef>
+          <a:effectRef idx="2">
+            <a:schemeClr val="accent1"/>
+          </a:effectRef>
+          <a:fontRef idx="minor">
+            <a:schemeClr val="lt1"/>
+          </a:fontRef>
+        </p:style>
+        <p:txBody>
+          <a:bodyPr rtlCol="0" anchor="ctr"/>
+          <a:lstStyle/>
+          <a:p>
+            <a:pPr algn="ctr"/>
+          </a:p>
+        </p:txBody>
+      </p:sp>
+      <p:sp>
+        <p:nvSpPr>
+          <p:cNvPr id="12" name="TextBox 11"/>
+          <p:cNvSpPr txBox="1"/>
+          <p:nvPr/>
+        </p:nvSpPr>
+        <p:spPr>
+          <a:xfrm>
+            <a:off x="6400800" y="3977640"/>
+            <a:ext cx="4800600" cy="1920240"/>
+          </a:xfrm>
+          <a:prstGeom prst="rect">
+            <a:avLst/>
+          </a:prstGeom>
+          <a:noFill/>
+        </p:spPr>
+        <p:txBody>
+          <a:bodyPr wrap="square">
+            <a:spAutoFit/>
+          </a:bodyPr>
+          <a:lstStyle/>
+          <a:p>
+            <a:pPr>
+              <a:defRPr sz="1000" b="1">
+                <a:solidFill>
+                  <a:srgbClr val="F59E0B"/>
+                </a:solidFill>
+              </a:defRPr>
+            </a:pPr>
+            <a:r>
+              <a:t>FRONTEND INTERFACE</a:t>
+            </a:r>
+          </a:p>
+          <a:p>
+            <a:pPr>
+              <a:defRPr sz="1400" b="1">
+                <a:solidFill>
                   <a:srgbClr val="F8FAFC"/>
                 </a:solidFill>
               </a:defRPr>
             </a:pPr>
             <a:r>
-              <a:t>✔ Real-Time Metrics: Displays cohort average attendance, submission delays, and high-risk flags at a glance.</a:t>
+              <a:t>React 18, Vite &amp; Recharts</a:t>
             </a:r>
           </a:p>
           <a:p>
@@ -10075,12 +11242,12 @@
             <a:pPr>
               <a:defRPr sz="1000">
                 <a:solidFill>
-                  <a:srgbClr val="F8FAFC"/>
-                </a:solidFill>
-              </a:defRPr>
-            </a:pPr>
-            <a:r>
-              <a:t>✔ Zero Guesswork: Faculty immediately see which students need support right now, without sifting through spreadsheets.</a:t>
+                  <a:srgbClr val="94A3B8"/>
+                </a:solidFill>
+              </a:defRPr>
+            </a:pPr>
+            <a:r>
+              <a:t>Sub-second Hot Module Replacement (HMR), SVG radial gauge rendering, Lucide Icons, responsive layout, Axios interceptors with automatic JWT auth management.</a:t>
             </a:r>
           </a:p>
         </p:txBody>
